--- a/ポートフォリオ.pptx
+++ b/ポートフォリオ.pptx
@@ -4,12 +4,17 @@
   <p:sldMasterIdLst>
     <p:sldMasterId id="2147483648" r:id="rId1"/>
   </p:sldMasterIdLst>
+  <p:notesMasterIdLst>
+    <p:notesMasterId r:id="rId9"/>
+  </p:notesMasterIdLst>
   <p:sldIdLst>
     <p:sldId id="256" r:id="rId2"/>
     <p:sldId id="257" r:id="rId3"/>
     <p:sldId id="259" r:id="rId4"/>
-    <p:sldId id="262" r:id="rId5"/>
-    <p:sldId id="264" r:id="rId6"/>
+    <p:sldId id="265" r:id="rId5"/>
+    <p:sldId id="262" r:id="rId6"/>
+    <p:sldId id="267" r:id="rId7"/>
+    <p:sldId id="266" r:id="rId8"/>
   </p:sldIdLst>
   <p:sldSz cx="12192000" cy="6858000"/>
   <p:notesSz cx="12192000" cy="6858000"/>
@@ -37,6 +42,599 @@
 </p:presentation>
 </file>
 
+<file path=ppt/notesMasters/notesMaster1.xml><?xml version="1.0" encoding="utf-8"?>
+<p:notesMaster xmlns:a="http://schemas.openxmlformats.org/drawingml/2006/main" xmlns:r="http://schemas.openxmlformats.org/officeDocument/2006/relationships" xmlns:p="http://schemas.openxmlformats.org/presentationml/2006/main">
+  <p:cSld>
+    <p:bg>
+      <p:bgRef idx="1001">
+        <a:schemeClr val="bg1"/>
+      </p:bgRef>
+    </p:bg>
+    <p:spTree>
+      <p:nvGrpSpPr>
+        <p:cNvPr id="1" name=""/>
+        <p:cNvGrpSpPr/>
+        <p:nvPr/>
+      </p:nvGrpSpPr>
+      <p:grpSpPr>
+        <a:xfrm>
+          <a:off x="0" y="0"/>
+          <a:ext cx="0" cy="0"/>
+          <a:chOff x="0" y="0"/>
+          <a:chExt cx="0" cy="0"/>
+        </a:xfrm>
+      </p:grpSpPr>
+      <p:sp>
+        <p:nvSpPr>
+          <p:cNvPr id="2" name="ヘッダー プレースホルダー 1"/>
+          <p:cNvSpPr>
+            <a:spLocks noGrp="1"/>
+          </p:cNvSpPr>
+          <p:nvPr>
+            <p:ph type="hdr" sz="quarter"/>
+          </p:nvPr>
+        </p:nvSpPr>
+        <p:spPr>
+          <a:xfrm>
+            <a:off x="0" y="0"/>
+            <a:ext cx="5283200" cy="344488"/>
+          </a:xfrm>
+          <a:prstGeom prst="rect">
+            <a:avLst/>
+          </a:prstGeom>
+        </p:spPr>
+        <p:txBody>
+          <a:bodyPr vert="horz" lIns="91440" tIns="45720" rIns="91440" bIns="45720" rtlCol="0"/>
+          <a:lstStyle>
+            <a:lvl1pPr algn="l">
+              <a:defRPr sz="1200"/>
+            </a:lvl1pPr>
+          </a:lstStyle>
+          <a:p>
+            <a:endParaRPr kumimoji="1" lang="ja-JP" altLang="en-US"/>
+          </a:p>
+        </p:txBody>
+      </p:sp>
+      <p:sp>
+        <p:nvSpPr>
+          <p:cNvPr id="3" name="日付プレースホルダー 2"/>
+          <p:cNvSpPr>
+            <a:spLocks noGrp="1"/>
+          </p:cNvSpPr>
+          <p:nvPr>
+            <p:ph type="dt" idx="1"/>
+          </p:nvPr>
+        </p:nvSpPr>
+        <p:spPr>
+          <a:xfrm>
+            <a:off x="6905625" y="0"/>
+            <a:ext cx="5283200" cy="344488"/>
+          </a:xfrm>
+          <a:prstGeom prst="rect">
+            <a:avLst/>
+          </a:prstGeom>
+        </p:spPr>
+        <p:txBody>
+          <a:bodyPr vert="horz" lIns="91440" tIns="45720" rIns="91440" bIns="45720" rtlCol="0"/>
+          <a:lstStyle>
+            <a:lvl1pPr algn="r">
+              <a:defRPr sz="1200"/>
+            </a:lvl1pPr>
+          </a:lstStyle>
+          <a:p>
+            <a:fld id="{C5387C26-E1C4-450F-855C-7A95B649E450}" type="datetimeFigureOut">
+              <a:rPr kumimoji="1" lang="ja-JP" altLang="en-US" smtClean="0"/>
+              <a:t>2026/2/2</a:t>
+            </a:fld>
+            <a:endParaRPr kumimoji="1" lang="ja-JP" altLang="en-US"/>
+          </a:p>
+        </p:txBody>
+      </p:sp>
+      <p:sp>
+        <p:nvSpPr>
+          <p:cNvPr id="4" name="スライド イメージ プレースホルダー 3"/>
+          <p:cNvSpPr>
+            <a:spLocks noGrp="1" noRot="1" noChangeAspect="1"/>
+          </p:cNvSpPr>
+          <p:nvPr>
+            <p:ph type="sldImg" idx="2"/>
+          </p:nvPr>
+        </p:nvSpPr>
+        <p:spPr>
+          <a:xfrm>
+            <a:off x="4038600" y="857250"/>
+            <a:ext cx="4114800" cy="2314575"/>
+          </a:xfrm>
+          <a:prstGeom prst="rect">
+            <a:avLst/>
+          </a:prstGeom>
+          <a:noFill/>
+          <a:ln w="12700">
+            <a:solidFill>
+              <a:prstClr val="black"/>
+            </a:solidFill>
+          </a:ln>
+        </p:spPr>
+        <p:txBody>
+          <a:bodyPr vert="horz" lIns="91440" tIns="45720" rIns="91440" bIns="45720" rtlCol="0" anchor="ctr"/>
+          <a:lstStyle/>
+          <a:p>
+            <a:endParaRPr lang="ja-JP" altLang="en-US"/>
+          </a:p>
+        </p:txBody>
+      </p:sp>
+      <p:sp>
+        <p:nvSpPr>
+          <p:cNvPr id="5" name="ノート プレースホルダー 4"/>
+          <p:cNvSpPr>
+            <a:spLocks noGrp="1"/>
+          </p:cNvSpPr>
+          <p:nvPr>
+            <p:ph type="body" sz="quarter" idx="3"/>
+          </p:nvPr>
+        </p:nvSpPr>
+        <p:spPr>
+          <a:xfrm>
+            <a:off x="1219200" y="3300413"/>
+            <a:ext cx="9753600" cy="2700337"/>
+          </a:xfrm>
+          <a:prstGeom prst="rect">
+            <a:avLst/>
+          </a:prstGeom>
+        </p:spPr>
+        <p:txBody>
+          <a:bodyPr vert="horz" lIns="91440" tIns="45720" rIns="91440" bIns="45720" rtlCol="0"/>
+          <a:lstStyle/>
+          <a:p>
+            <a:pPr lvl="0"/>
+            <a:r>
+              <a:rPr kumimoji="1" lang="ja-JP" altLang="en-US"/>
+              <a:t>マスター テキストの書式設定</a:t>
+            </a:r>
+          </a:p>
+          <a:p>
+            <a:pPr lvl="1"/>
+            <a:r>
+              <a:rPr kumimoji="1" lang="ja-JP" altLang="en-US"/>
+              <a:t>第 </a:t>
+            </a:r>
+            <a:r>
+              <a:rPr kumimoji="1" lang="en-US" altLang="ja-JP"/>
+              <a:t>2 </a:t>
+            </a:r>
+            <a:r>
+              <a:rPr kumimoji="1" lang="ja-JP" altLang="en-US"/>
+              <a:t>レベル</a:t>
+            </a:r>
+          </a:p>
+          <a:p>
+            <a:pPr lvl="2"/>
+            <a:r>
+              <a:rPr kumimoji="1" lang="ja-JP" altLang="en-US"/>
+              <a:t>第 </a:t>
+            </a:r>
+            <a:r>
+              <a:rPr kumimoji="1" lang="en-US" altLang="ja-JP"/>
+              <a:t>3 </a:t>
+            </a:r>
+            <a:r>
+              <a:rPr kumimoji="1" lang="ja-JP" altLang="en-US"/>
+              <a:t>レベル</a:t>
+            </a:r>
+          </a:p>
+          <a:p>
+            <a:pPr lvl="3"/>
+            <a:r>
+              <a:rPr kumimoji="1" lang="ja-JP" altLang="en-US"/>
+              <a:t>第 </a:t>
+            </a:r>
+            <a:r>
+              <a:rPr kumimoji="1" lang="en-US" altLang="ja-JP"/>
+              <a:t>4 </a:t>
+            </a:r>
+            <a:r>
+              <a:rPr kumimoji="1" lang="ja-JP" altLang="en-US"/>
+              <a:t>レベル</a:t>
+            </a:r>
+          </a:p>
+          <a:p>
+            <a:pPr lvl="4"/>
+            <a:r>
+              <a:rPr kumimoji="1" lang="ja-JP" altLang="en-US"/>
+              <a:t>第 </a:t>
+            </a:r>
+            <a:r>
+              <a:rPr kumimoji="1" lang="en-US" altLang="ja-JP"/>
+              <a:t>5 </a:t>
+            </a:r>
+            <a:r>
+              <a:rPr kumimoji="1" lang="ja-JP" altLang="en-US"/>
+              <a:t>レベル</a:t>
+            </a:r>
+          </a:p>
+        </p:txBody>
+      </p:sp>
+      <p:sp>
+        <p:nvSpPr>
+          <p:cNvPr id="6" name="フッター プレースホルダー 5"/>
+          <p:cNvSpPr>
+            <a:spLocks noGrp="1"/>
+          </p:cNvSpPr>
+          <p:nvPr>
+            <p:ph type="ftr" sz="quarter" idx="4"/>
+          </p:nvPr>
+        </p:nvSpPr>
+        <p:spPr>
+          <a:xfrm>
+            <a:off x="0" y="6513513"/>
+            <a:ext cx="5283200" cy="344487"/>
+          </a:xfrm>
+          <a:prstGeom prst="rect">
+            <a:avLst/>
+          </a:prstGeom>
+        </p:spPr>
+        <p:txBody>
+          <a:bodyPr vert="horz" lIns="91440" tIns="45720" rIns="91440" bIns="45720" rtlCol="0" anchor="b"/>
+          <a:lstStyle>
+            <a:lvl1pPr algn="l">
+              <a:defRPr sz="1200"/>
+            </a:lvl1pPr>
+          </a:lstStyle>
+          <a:p>
+            <a:endParaRPr kumimoji="1" lang="ja-JP" altLang="en-US"/>
+          </a:p>
+        </p:txBody>
+      </p:sp>
+      <p:sp>
+        <p:nvSpPr>
+          <p:cNvPr id="7" name="スライド番号プレースホルダー 6"/>
+          <p:cNvSpPr>
+            <a:spLocks noGrp="1"/>
+          </p:cNvSpPr>
+          <p:nvPr>
+            <p:ph type="sldNum" sz="quarter" idx="5"/>
+          </p:nvPr>
+        </p:nvSpPr>
+        <p:spPr>
+          <a:xfrm>
+            <a:off x="6905625" y="6513513"/>
+            <a:ext cx="5283200" cy="344487"/>
+          </a:xfrm>
+          <a:prstGeom prst="rect">
+            <a:avLst/>
+          </a:prstGeom>
+        </p:spPr>
+        <p:txBody>
+          <a:bodyPr vert="horz" lIns="91440" tIns="45720" rIns="91440" bIns="45720" rtlCol="0" anchor="b"/>
+          <a:lstStyle>
+            <a:lvl1pPr algn="r">
+              <a:defRPr sz="1200"/>
+            </a:lvl1pPr>
+          </a:lstStyle>
+          <a:p>
+            <a:fld id="{73128D3D-FF30-4A8F-A1BA-CF24F881B431}" type="slidenum">
+              <a:rPr kumimoji="1" lang="ja-JP" altLang="en-US" smtClean="0"/>
+              <a:t>‹#›</a:t>
+            </a:fld>
+            <a:endParaRPr kumimoji="1" lang="ja-JP" altLang="en-US"/>
+          </a:p>
+        </p:txBody>
+      </p:sp>
+    </p:spTree>
+    <p:extLst>
+      <p:ext uri="{BB962C8B-B14F-4D97-AF65-F5344CB8AC3E}">
+        <p14:creationId xmlns:p14="http://schemas.microsoft.com/office/powerpoint/2010/main" val="1724633275"/>
+      </p:ext>
+    </p:extLst>
+  </p:cSld>
+  <p:clrMap bg1="lt1" tx1="dk1" bg2="lt2" tx2="dk2" accent1="accent1" accent2="accent2" accent3="accent3" accent4="accent4" accent5="accent5" accent6="accent6" hlink="hlink" folHlink="folHlink"/>
+  <p:notesStyle>
+    <a:lvl1pPr marL="0" algn="l" defTabSz="914400" rtl="0" eaLnBrk="1" latinLnBrk="0" hangingPunct="1">
+      <a:defRPr kumimoji="1" sz="1200" kern="1200">
+        <a:solidFill>
+          <a:schemeClr val="tx1"/>
+        </a:solidFill>
+        <a:latin typeface="+mn-lt"/>
+        <a:ea typeface="+mn-ea"/>
+        <a:cs typeface="+mn-cs"/>
+      </a:defRPr>
+    </a:lvl1pPr>
+    <a:lvl2pPr marL="457200" algn="l" defTabSz="914400" rtl="0" eaLnBrk="1" latinLnBrk="0" hangingPunct="1">
+      <a:defRPr kumimoji="1" sz="1200" kern="1200">
+        <a:solidFill>
+          <a:schemeClr val="tx1"/>
+        </a:solidFill>
+        <a:latin typeface="+mn-lt"/>
+        <a:ea typeface="+mn-ea"/>
+        <a:cs typeface="+mn-cs"/>
+      </a:defRPr>
+    </a:lvl2pPr>
+    <a:lvl3pPr marL="914400" algn="l" defTabSz="914400" rtl="0" eaLnBrk="1" latinLnBrk="0" hangingPunct="1">
+      <a:defRPr kumimoji="1" sz="1200" kern="1200">
+        <a:solidFill>
+          <a:schemeClr val="tx1"/>
+        </a:solidFill>
+        <a:latin typeface="+mn-lt"/>
+        <a:ea typeface="+mn-ea"/>
+        <a:cs typeface="+mn-cs"/>
+      </a:defRPr>
+    </a:lvl3pPr>
+    <a:lvl4pPr marL="1371600" algn="l" defTabSz="914400" rtl="0" eaLnBrk="1" latinLnBrk="0" hangingPunct="1">
+      <a:defRPr kumimoji="1" sz="1200" kern="1200">
+        <a:solidFill>
+          <a:schemeClr val="tx1"/>
+        </a:solidFill>
+        <a:latin typeface="+mn-lt"/>
+        <a:ea typeface="+mn-ea"/>
+        <a:cs typeface="+mn-cs"/>
+      </a:defRPr>
+    </a:lvl4pPr>
+    <a:lvl5pPr marL="1828800" algn="l" defTabSz="914400" rtl="0" eaLnBrk="1" latinLnBrk="0" hangingPunct="1">
+      <a:defRPr kumimoji="1" sz="1200" kern="1200">
+        <a:solidFill>
+          <a:schemeClr val="tx1"/>
+        </a:solidFill>
+        <a:latin typeface="+mn-lt"/>
+        <a:ea typeface="+mn-ea"/>
+        <a:cs typeface="+mn-cs"/>
+      </a:defRPr>
+    </a:lvl5pPr>
+    <a:lvl6pPr marL="2286000" algn="l" defTabSz="914400" rtl="0" eaLnBrk="1" latinLnBrk="0" hangingPunct="1">
+      <a:defRPr kumimoji="1" sz="1200" kern="1200">
+        <a:solidFill>
+          <a:schemeClr val="tx1"/>
+        </a:solidFill>
+        <a:latin typeface="+mn-lt"/>
+        <a:ea typeface="+mn-ea"/>
+        <a:cs typeface="+mn-cs"/>
+      </a:defRPr>
+    </a:lvl6pPr>
+    <a:lvl7pPr marL="2743200" algn="l" defTabSz="914400" rtl="0" eaLnBrk="1" latinLnBrk="0" hangingPunct="1">
+      <a:defRPr kumimoji="1" sz="1200" kern="1200">
+        <a:solidFill>
+          <a:schemeClr val="tx1"/>
+        </a:solidFill>
+        <a:latin typeface="+mn-lt"/>
+        <a:ea typeface="+mn-ea"/>
+        <a:cs typeface="+mn-cs"/>
+      </a:defRPr>
+    </a:lvl7pPr>
+    <a:lvl8pPr marL="3200400" algn="l" defTabSz="914400" rtl="0" eaLnBrk="1" latinLnBrk="0" hangingPunct="1">
+      <a:defRPr kumimoji="1" sz="1200" kern="1200">
+        <a:solidFill>
+          <a:schemeClr val="tx1"/>
+        </a:solidFill>
+        <a:latin typeface="+mn-lt"/>
+        <a:ea typeface="+mn-ea"/>
+        <a:cs typeface="+mn-cs"/>
+      </a:defRPr>
+    </a:lvl8pPr>
+    <a:lvl9pPr marL="3657600" algn="l" defTabSz="914400" rtl="0" eaLnBrk="1" latinLnBrk="0" hangingPunct="1">
+      <a:defRPr kumimoji="1" sz="1200" kern="1200">
+        <a:solidFill>
+          <a:schemeClr val="tx1"/>
+        </a:solidFill>
+        <a:latin typeface="+mn-lt"/>
+        <a:ea typeface="+mn-ea"/>
+        <a:cs typeface="+mn-cs"/>
+      </a:defRPr>
+    </a:lvl9pPr>
+  </p:notesStyle>
+</p:notesMaster>
+</file>
+
+<file path=ppt/notesSlides/notesSlide1.xml><?xml version="1.0" encoding="utf-8"?>
+<p:notes xmlns:a="http://schemas.openxmlformats.org/drawingml/2006/main" xmlns:r="http://schemas.openxmlformats.org/officeDocument/2006/relationships" xmlns:p="http://schemas.openxmlformats.org/presentationml/2006/main">
+  <p:cSld>
+    <p:spTree>
+      <p:nvGrpSpPr>
+        <p:cNvPr id="1" name=""/>
+        <p:cNvGrpSpPr/>
+        <p:nvPr/>
+      </p:nvGrpSpPr>
+      <p:grpSpPr>
+        <a:xfrm>
+          <a:off x="0" y="0"/>
+          <a:ext cx="0" cy="0"/>
+          <a:chOff x="0" y="0"/>
+          <a:chExt cx="0" cy="0"/>
+        </a:xfrm>
+      </p:grpSpPr>
+      <p:sp>
+        <p:nvSpPr>
+          <p:cNvPr id="2" name="スライド イメージ プレースホルダー 1"/>
+          <p:cNvSpPr>
+            <a:spLocks noGrp="1" noRot="1" noChangeAspect="1"/>
+          </p:cNvSpPr>
+          <p:nvPr>
+            <p:ph type="sldImg"/>
+          </p:nvPr>
+        </p:nvSpPr>
+        <p:spPr/>
+      </p:sp>
+      <p:sp>
+        <p:nvSpPr>
+          <p:cNvPr id="3" name="ノート プレースホルダー 2"/>
+          <p:cNvSpPr>
+            <a:spLocks noGrp="1"/>
+          </p:cNvSpPr>
+          <p:nvPr>
+            <p:ph type="body" idx="1"/>
+          </p:nvPr>
+        </p:nvSpPr>
+        <p:spPr/>
+        <p:txBody>
+          <a:bodyPr/>
+          <a:lstStyle/>
+          <a:p>
+            <a:r>
+              <a:rPr kumimoji="1" lang="ja-JP" altLang="en-US" dirty="0"/>
+              <a:t>著作権的にまずいかも　後で要確認</a:t>
+            </a:r>
+            <a:endParaRPr kumimoji="1" lang="en-US" altLang="ja-JP" dirty="0"/>
+          </a:p>
+          <a:p>
+            <a:r>
+              <a:rPr kumimoji="1" lang="ja-JP" altLang="en-US" dirty="0"/>
+              <a:t>ゲームの画像だけ差し替える</a:t>
+            </a:r>
+          </a:p>
+        </p:txBody>
+      </p:sp>
+      <p:sp>
+        <p:nvSpPr>
+          <p:cNvPr id="4" name="スライド番号プレースホルダー 3"/>
+          <p:cNvSpPr>
+            <a:spLocks noGrp="1"/>
+          </p:cNvSpPr>
+          <p:nvPr>
+            <p:ph type="sldNum" sz="quarter" idx="5"/>
+          </p:nvPr>
+        </p:nvSpPr>
+        <p:spPr/>
+        <p:txBody>
+          <a:bodyPr/>
+          <a:lstStyle/>
+          <a:p>
+            <a:fld id="{73128D3D-FF30-4A8F-A1BA-CF24F881B431}" type="slidenum">
+              <a:rPr kumimoji="1" lang="ja-JP" altLang="en-US" smtClean="0"/>
+              <a:t>5</a:t>
+            </a:fld>
+            <a:endParaRPr kumimoji="1" lang="ja-JP" altLang="en-US"/>
+          </a:p>
+        </p:txBody>
+      </p:sp>
+    </p:spTree>
+    <p:extLst>
+      <p:ext uri="{BB962C8B-B14F-4D97-AF65-F5344CB8AC3E}">
+        <p14:creationId xmlns:p14="http://schemas.microsoft.com/office/powerpoint/2010/main" val="1559124005"/>
+      </p:ext>
+    </p:extLst>
+  </p:cSld>
+  <p:clrMapOvr>
+    <a:masterClrMapping/>
+  </p:clrMapOvr>
+</p:notes>
+</file>
+
+<file path=ppt/notesSlides/notesSlide2.xml><?xml version="1.0" encoding="utf-8"?>
+<p:notes xmlns:a="http://schemas.openxmlformats.org/drawingml/2006/main" xmlns:r="http://schemas.openxmlformats.org/officeDocument/2006/relationships" xmlns:p="http://schemas.openxmlformats.org/presentationml/2006/main">
+  <p:cSld>
+    <p:spTree>
+      <p:nvGrpSpPr>
+        <p:cNvPr id="1" name="">
+          <a:extLst>
+            <a:ext uri="{FF2B5EF4-FFF2-40B4-BE49-F238E27FC236}">
+              <a16:creationId xmlns:a16="http://schemas.microsoft.com/office/drawing/2014/main" id="{9734220D-9696-905B-571E-EA2EDE99BF57}"/>
+            </a:ext>
+          </a:extLst>
+        </p:cNvPr>
+        <p:cNvGrpSpPr/>
+        <p:nvPr/>
+      </p:nvGrpSpPr>
+      <p:grpSpPr>
+        <a:xfrm>
+          <a:off x="0" y="0"/>
+          <a:ext cx="0" cy="0"/>
+          <a:chOff x="0" y="0"/>
+          <a:chExt cx="0" cy="0"/>
+        </a:xfrm>
+      </p:grpSpPr>
+      <p:sp>
+        <p:nvSpPr>
+          <p:cNvPr id="2" name="スライド イメージ プレースホルダー 1">
+            <a:extLst>
+              <a:ext uri="{FF2B5EF4-FFF2-40B4-BE49-F238E27FC236}">
+                <a16:creationId xmlns:a16="http://schemas.microsoft.com/office/drawing/2014/main" id="{68C7CCA9-B5E5-114C-A3B3-6FE11DAD93E4}"/>
+              </a:ext>
+            </a:extLst>
+          </p:cNvPr>
+          <p:cNvSpPr>
+            <a:spLocks noGrp="1" noRot="1" noChangeAspect="1"/>
+          </p:cNvSpPr>
+          <p:nvPr>
+            <p:ph type="sldImg"/>
+          </p:nvPr>
+        </p:nvSpPr>
+        <p:spPr/>
+      </p:sp>
+      <p:sp>
+        <p:nvSpPr>
+          <p:cNvPr id="3" name="ノート プレースホルダー 2">
+            <a:extLst>
+              <a:ext uri="{FF2B5EF4-FFF2-40B4-BE49-F238E27FC236}">
+                <a16:creationId xmlns:a16="http://schemas.microsoft.com/office/drawing/2014/main" id="{BD853B7F-1197-201F-AE3B-6A80F9436015}"/>
+              </a:ext>
+            </a:extLst>
+          </p:cNvPr>
+          <p:cNvSpPr>
+            <a:spLocks noGrp="1"/>
+          </p:cNvSpPr>
+          <p:nvPr>
+            <p:ph type="body" idx="1"/>
+          </p:nvPr>
+        </p:nvSpPr>
+        <p:spPr/>
+        <p:txBody>
+          <a:bodyPr/>
+          <a:lstStyle/>
+          <a:p>
+            <a:r>
+              <a:rPr kumimoji="1" lang="ja-JP" altLang="en-US" dirty="0"/>
+              <a:t>著作権的にまずいかも　後で要確認</a:t>
+            </a:r>
+            <a:endParaRPr kumimoji="1" lang="en-US" altLang="ja-JP" dirty="0"/>
+          </a:p>
+          <a:p>
+            <a:r>
+              <a:rPr kumimoji="1" lang="ja-JP" altLang="en-US" dirty="0"/>
+              <a:t>ゲームの画像だけ差し替える</a:t>
+            </a:r>
+          </a:p>
+        </p:txBody>
+      </p:sp>
+      <p:sp>
+        <p:nvSpPr>
+          <p:cNvPr id="4" name="スライド番号プレースホルダー 3">
+            <a:extLst>
+              <a:ext uri="{FF2B5EF4-FFF2-40B4-BE49-F238E27FC236}">
+                <a16:creationId xmlns:a16="http://schemas.microsoft.com/office/drawing/2014/main" id="{EB3196B1-3D12-B56D-8C91-472C070E5AFF}"/>
+              </a:ext>
+            </a:extLst>
+          </p:cNvPr>
+          <p:cNvSpPr>
+            <a:spLocks noGrp="1"/>
+          </p:cNvSpPr>
+          <p:nvPr>
+            <p:ph type="sldNum" sz="quarter" idx="5"/>
+          </p:nvPr>
+        </p:nvSpPr>
+        <p:spPr/>
+        <p:txBody>
+          <a:bodyPr/>
+          <a:lstStyle/>
+          <a:p>
+            <a:fld id="{73128D3D-FF30-4A8F-A1BA-CF24F881B431}" type="slidenum">
+              <a:rPr kumimoji="1" lang="ja-JP" altLang="en-US" smtClean="0"/>
+              <a:t>6</a:t>
+            </a:fld>
+            <a:endParaRPr kumimoji="1" lang="ja-JP" altLang="en-US"/>
+          </a:p>
+        </p:txBody>
+      </p:sp>
+    </p:spTree>
+    <p:extLst>
+      <p:ext uri="{BB962C8B-B14F-4D97-AF65-F5344CB8AC3E}">
+        <p14:creationId xmlns:p14="http://schemas.microsoft.com/office/powerpoint/2010/main" val="199040796"/>
+      </p:ext>
+    </p:extLst>
+  </p:cSld>
+  <p:clrMapOvr>
+    <a:masterClrMapping/>
+  </p:clrMapOvr>
+</p:notes>
+</file>
+
 <file path=ppt/slideLayouts/slideLayout1.xml><?xml version="1.0" encoding="utf-8"?>
 <p:sldLayout xmlns:a="http://schemas.openxmlformats.org/drawingml/2006/main" xmlns:r="http://schemas.openxmlformats.org/officeDocument/2006/relationships" xmlns:p="http://schemas.openxmlformats.org/presentationml/2006/main" type="obj" preserve="1">
   <p:cSld name="Title Slide">
@@ -188,7 +786,7 @@
           <a:p>
             <a:fld id="{1D8BD707-D9CF-40AE-B4C6-C98DA3205C09}" type="datetimeFigureOut">
               <a:rPr lang="en-US"/>
-              <a:t>1/29/2026</a:t>
+              <a:t>2/2/2026</a:t>
             </a:fld>
             <a:endParaRPr lang="en-US"/>
           </a:p>
@@ -365,7 +963,7 @@
           <a:p>
             <a:fld id="{1D8BD707-D9CF-40AE-B4C6-C98DA3205C09}" type="datetimeFigureOut">
               <a:rPr lang="en-US"/>
-              <a:t>1/29/2026</a:t>
+              <a:t>2/2/2026</a:t>
             </a:fld>
             <a:endParaRPr lang="en-US"/>
           </a:p>
@@ -579,7 +1177,7 @@
           <a:p>
             <a:fld id="{1D8BD707-D9CF-40AE-B4C6-C98DA3205C09}" type="datetimeFigureOut">
               <a:rPr lang="en-US"/>
-              <a:t>1/29/2026</a:t>
+              <a:t>2/2/2026</a:t>
             </a:fld>
             <a:endParaRPr lang="en-US"/>
           </a:p>
@@ -727,7 +1325,7 @@
           <a:p>
             <a:fld id="{1D8BD707-D9CF-40AE-B4C6-C98DA3205C09}" type="datetimeFigureOut">
               <a:rPr lang="en-US"/>
-              <a:t>1/29/2026</a:t>
+              <a:t>2/2/2026</a:t>
             </a:fld>
             <a:endParaRPr lang="en-US"/>
           </a:p>
@@ -846,7 +1444,7 @@
           <a:p>
             <a:fld id="{1D8BD707-D9CF-40AE-B4C6-C98DA3205C09}" type="datetimeFigureOut">
               <a:rPr lang="en-US"/>
-              <a:t>1/29/2026</a:t>
+              <a:t>2/2/2026</a:t>
             </a:fld>
             <a:endParaRPr lang="en-US"/>
           </a:p>
@@ -1093,7 +1691,7 @@
           <a:p>
             <a:fld id="{1D8BD707-D9CF-40AE-B4C6-C98DA3205C09}" type="datetimeFigureOut">
               <a:rPr lang="en-US"/>
-              <a:t>1/29/2026</a:t>
+              <a:t>2/2/2026</a:t>
             </a:fld>
             <a:endParaRPr lang="en-US"/>
           </a:p>
@@ -1324,7 +1922,7 @@
         </p:nvSpPr>
         <p:spPr>
           <a:xfrm>
-            <a:off x="727710" y="1447800"/>
+            <a:off x="727710" y="1981200"/>
             <a:ext cx="10736580" cy="936154"/>
           </a:xfrm>
           <a:prstGeom prst="rect">
@@ -1361,8 +1959,8 @@
         </p:nvSpPr>
         <p:spPr>
           <a:xfrm>
-            <a:off x="8534400" y="5181600"/>
-            <a:ext cx="3429000" cy="1057341"/>
+            <a:off x="2743200" y="3581400"/>
+            <a:ext cx="6705600" cy="1057341"/>
           </a:xfrm>
           <a:prstGeom prst="rect">
             <a:avLst/>
@@ -1374,7 +1972,7 @@
           </a:bodyPr>
           <a:lstStyle/>
           <a:p>
-            <a:pPr marL="12700">
+            <a:pPr marL="12700" algn="ctr">
               <a:lnSpc>
                 <a:spcPct val="100000"/>
               </a:lnSpc>
@@ -1420,7 +2018,7 @@
                 <a:latin typeface="MS Gothic"/>
                 <a:cs typeface="MS Gothic"/>
               </a:rPr>
-              <a:t>年制</a:t>
+              <a:t>年制学科 </a:t>
             </a:r>
             <a:endParaRPr lang="en-US" altLang="ja-JP" sz="2800" spc="-125" dirty="0">
               <a:solidFill>
@@ -1619,7 +2217,7 @@
                   <a:schemeClr val="bg1"/>
                 </a:solidFill>
               </a:rPr>
-              <a:t>就職作品</a:t>
+              <a:t>人物像</a:t>
             </a:r>
           </a:p>
         </p:txBody>
@@ -1669,7 +2267,7 @@
                   <a:schemeClr val="bg1"/>
                 </a:solidFill>
               </a:rPr>
-              <a:t>過去作品</a:t>
+              <a:t>制作作品</a:t>
             </a:r>
           </a:p>
         </p:txBody>
@@ -1728,8 +2326,8 @@
         </p:nvSpPr>
         <p:spPr>
           <a:xfrm>
-            <a:off x="371168" y="390832"/>
-            <a:ext cx="7287259" cy="923330"/>
+            <a:off x="371169" y="390832"/>
+            <a:ext cx="4505632" cy="923330"/>
           </a:xfrm>
         </p:spPr>
         <p:txBody>
@@ -1757,15 +2355,20 @@
         </p:nvSpPr>
         <p:spPr>
           <a:xfrm>
-            <a:off x="371168" y="1772040"/>
-            <a:ext cx="6105832" cy="584775"/>
-          </a:xfrm>
-          <a:prstGeom prst="rect">
-            <a:avLst/>
+            <a:off x="321521" y="1436110"/>
+            <a:ext cx="3134032" cy="1639788"/>
+          </a:xfrm>
+          <a:prstGeom prst="cloudCallout">
+            <a:avLst>
+              <a:gd name="adj1" fmla="val -17068"/>
+              <a:gd name="adj2" fmla="val 131455"/>
+            </a:avLst>
           </a:prstGeom>
           <a:noFill/>
           <a:ln w="19050">
-            <a:noFill/>
+            <a:solidFill>
+              <a:schemeClr val="bg1"/>
+            </a:solidFill>
           </a:ln>
         </p:spPr>
         <p:txBody>
@@ -1781,47 +2384,30 @@
                   <a:schemeClr val="bg1"/>
                 </a:solidFill>
               </a:rPr>
-              <a:t>名前 </a:t>
-            </a:r>
-            <a:r>
+              <a:t>名前</a:t>
+            </a:r>
+            <a:br>
               <a:rPr kumimoji="1" lang="en-US" altLang="ja-JP" sz="3200" dirty="0">
                 <a:solidFill>
                   <a:schemeClr val="bg1"/>
                 </a:solidFill>
               </a:rPr>
-              <a:t>: </a:t>
-            </a:r>
+            </a:br>
             <a:r>
               <a:rPr kumimoji="1" lang="ja-JP" altLang="en-US" sz="3200" dirty="0">
                 <a:solidFill>
                   <a:schemeClr val="bg1"/>
                 </a:solidFill>
               </a:rPr>
-              <a:t>松田 健志 </a:t>
-            </a:r>
-            <a:r>
-              <a:rPr kumimoji="1" lang="en-US" altLang="ja-JP" sz="3200" dirty="0">
-                <a:solidFill>
-                  <a:schemeClr val="bg1"/>
-                </a:solidFill>
-              </a:rPr>
-              <a:t>(</a:t>
-            </a:r>
-            <a:r>
-              <a:rPr kumimoji="1" lang="ja-JP" altLang="en-US" sz="3200" dirty="0">
-                <a:solidFill>
-                  <a:schemeClr val="bg1"/>
-                </a:solidFill>
-              </a:rPr>
-              <a:t>マツダ タケシ</a:t>
-            </a:r>
-            <a:r>
-              <a:rPr kumimoji="1" lang="en-US" altLang="ja-JP" sz="3200" dirty="0">
-                <a:solidFill>
-                  <a:schemeClr val="bg1"/>
-                </a:solidFill>
-              </a:rPr>
-              <a:t>)</a:t>
+              <a:t>松田 健志</a:t>
+            </a:r>
+            <a:r>
+              <a:rPr kumimoji="1" lang="ja-JP" altLang="en-US" sz="3200" b="1" dirty="0">
+                <a:solidFill>
+                  <a:schemeClr val="bg1"/>
+                </a:solidFill>
+              </a:rPr>
+              <a:t> </a:t>
             </a:r>
             <a:endParaRPr kumimoji="1" lang="ja-JP" altLang="en-US" sz="3200" dirty="0">
               <a:solidFill>
@@ -1831,34 +2417,738 @@
           </a:p>
         </p:txBody>
       </p:sp>
-      <p:pic>
-        <p:nvPicPr>
-          <p:cNvPr id="4" name="object 7">
+      <p:grpSp>
+        <p:nvGrpSpPr>
+          <p:cNvPr id="9" name="グループ化 8">
             <a:extLst>
               <a:ext uri="{FF2B5EF4-FFF2-40B4-BE49-F238E27FC236}">
-                <a16:creationId xmlns:a16="http://schemas.microsoft.com/office/drawing/2014/main" id="{9AF6E3C0-B3DE-5725-C8A8-69A49C13BA52}"/>
+                <a16:creationId xmlns:a16="http://schemas.microsoft.com/office/drawing/2014/main" id="{02CFD728-EA6C-633E-55E4-95A99AA62D7B}"/>
               </a:ext>
             </a:extLst>
           </p:cNvPr>
-          <p:cNvPicPr/>
+          <p:cNvGrpSpPr/>
+          <p:nvPr/>
+        </p:nvGrpSpPr>
+        <p:grpSpPr>
+          <a:xfrm>
+            <a:off x="4724849" y="3362286"/>
+            <a:ext cx="6833419" cy="1570069"/>
+            <a:chOff x="4724849" y="3362286"/>
+            <a:chExt cx="6833419" cy="1570069"/>
+          </a:xfrm>
+        </p:grpSpPr>
+        <p:sp>
+          <p:nvSpPr>
+            <p:cNvPr id="6" name="テキスト ボックス 5">
+              <a:extLst>
+                <a:ext uri="{FF2B5EF4-FFF2-40B4-BE49-F238E27FC236}">
+                  <a16:creationId xmlns:a16="http://schemas.microsoft.com/office/drawing/2014/main" id="{FCD69299-3220-76EA-B8EB-16CDFD5086A6}"/>
+                </a:ext>
+              </a:extLst>
+            </p:cNvPr>
+            <p:cNvSpPr txBox="1"/>
+            <p:nvPr/>
+          </p:nvSpPr>
+          <p:spPr>
+            <a:xfrm>
+              <a:off x="4724849" y="3362286"/>
+              <a:ext cx="1109816" cy="584775"/>
+            </a:xfrm>
+            <a:prstGeom prst="rect">
+              <a:avLst/>
+            </a:prstGeom>
+            <a:noFill/>
+            <a:ln w="19050">
+              <a:noFill/>
+            </a:ln>
+          </p:spPr>
+          <p:txBody>
+            <a:bodyPr wrap="square" rtlCol="0">
+              <a:spAutoFit/>
+            </a:bodyPr>
+            <a:lstStyle/>
+            <a:p>
+              <a:pPr algn="l"/>
+              <a:r>
+                <a:rPr kumimoji="1" lang="ja-JP" altLang="en-US" sz="3200" dirty="0">
+                  <a:solidFill>
+                    <a:schemeClr val="bg1"/>
+                  </a:solidFill>
+                </a:rPr>
+                <a:t>資格</a:t>
+              </a:r>
+            </a:p>
+          </p:txBody>
+        </p:sp>
+        <p:sp>
+          <p:nvSpPr>
+            <p:cNvPr id="7" name="テキスト ボックス 6">
+              <a:extLst>
+                <a:ext uri="{FF2B5EF4-FFF2-40B4-BE49-F238E27FC236}">
+                  <a16:creationId xmlns:a16="http://schemas.microsoft.com/office/drawing/2014/main" id="{120F58C8-C2E7-9213-433F-F8DAA5F27759}"/>
+                </a:ext>
+              </a:extLst>
+            </p:cNvPr>
+            <p:cNvSpPr txBox="1"/>
+            <p:nvPr/>
+          </p:nvSpPr>
+          <p:spPr>
+            <a:xfrm>
+              <a:off x="4724849" y="3855137"/>
+              <a:ext cx="6833419" cy="1077218"/>
+            </a:xfrm>
+            <a:prstGeom prst="rect">
+              <a:avLst/>
+            </a:prstGeom>
+            <a:noFill/>
+            <a:ln w="19050">
+              <a:noFill/>
+            </a:ln>
+          </p:spPr>
+          <p:txBody>
+            <a:bodyPr wrap="square" rtlCol="0">
+              <a:spAutoFit/>
+            </a:bodyPr>
+            <a:lstStyle/>
+            <a:p>
+              <a:pPr algn="l"/>
+              <a:r>
+                <a:rPr kumimoji="1" lang="ja-JP" altLang="en-US" sz="3200" dirty="0">
+                  <a:solidFill>
+                    <a:schemeClr val="bg1"/>
+                  </a:solidFill>
+                </a:rPr>
+                <a:t>・ 基本情報技術者試験</a:t>
+              </a:r>
+              <a:endParaRPr kumimoji="1" lang="en-US" altLang="ja-JP" sz="3200" dirty="0">
+                <a:solidFill>
+                  <a:schemeClr val="bg1"/>
+                </a:solidFill>
+              </a:endParaRPr>
+            </a:p>
+            <a:p>
+              <a:pPr algn="l"/>
+              <a:r>
+                <a:rPr kumimoji="1" lang="ja-JP" altLang="en-US" sz="3200" dirty="0">
+                  <a:solidFill>
+                    <a:schemeClr val="bg1"/>
+                  </a:solidFill>
+                </a:rPr>
+                <a:t>・ </a:t>
+              </a:r>
+              <a:r>
+                <a:rPr kumimoji="1" lang="en-US" altLang="ja-JP" sz="3200" dirty="0">
+                  <a:solidFill>
+                    <a:schemeClr val="bg1"/>
+                  </a:solidFill>
+                </a:rPr>
+                <a:t>CG</a:t>
+              </a:r>
+              <a:r>
+                <a:rPr kumimoji="1" lang="ja-JP" altLang="en-US" sz="3200" dirty="0">
+                  <a:solidFill>
+                    <a:schemeClr val="bg1"/>
+                  </a:solidFill>
+                </a:rPr>
+                <a:t>エンジニア検定エキスパート</a:t>
+              </a:r>
+              <a:endParaRPr kumimoji="1" lang="en-US" altLang="ja-JP" sz="3200" dirty="0">
+                <a:solidFill>
+                  <a:schemeClr val="bg1"/>
+                </a:solidFill>
+              </a:endParaRPr>
+            </a:p>
+          </p:txBody>
+        </p:sp>
+      </p:grpSp>
+      <p:grpSp>
+        <p:nvGrpSpPr>
+          <p:cNvPr id="8" name="グループ化 7">
+            <a:extLst>
+              <a:ext uri="{FF2B5EF4-FFF2-40B4-BE49-F238E27FC236}">
+                <a16:creationId xmlns:a16="http://schemas.microsoft.com/office/drawing/2014/main" id="{F3417636-3837-97B3-2539-48B29CAA4068}"/>
+              </a:ext>
+            </a:extLst>
+          </p:cNvPr>
+          <p:cNvGrpSpPr/>
+          <p:nvPr/>
+        </p:nvGrpSpPr>
+        <p:grpSpPr>
+          <a:xfrm>
+            <a:off x="3657600" y="5189397"/>
+            <a:ext cx="8315632" cy="1088907"/>
+            <a:chOff x="3657600" y="5189397"/>
+            <a:chExt cx="8315632" cy="1088907"/>
+          </a:xfrm>
+        </p:grpSpPr>
+        <p:sp>
+          <p:nvSpPr>
+            <p:cNvPr id="12" name="テキスト ボックス 11">
+              <a:extLst>
+                <a:ext uri="{FF2B5EF4-FFF2-40B4-BE49-F238E27FC236}">
+                  <a16:creationId xmlns:a16="http://schemas.microsoft.com/office/drawing/2014/main" id="{6C375FD5-B9CC-1D91-FDC2-57C60E50DC51}"/>
+                </a:ext>
+              </a:extLst>
+            </p:cNvPr>
+            <p:cNvSpPr txBox="1"/>
+            <p:nvPr/>
+          </p:nvSpPr>
+          <p:spPr>
+            <a:xfrm>
+              <a:off x="3657600" y="5189397"/>
+              <a:ext cx="1499419" cy="584775"/>
+            </a:xfrm>
+            <a:prstGeom prst="rect">
+              <a:avLst/>
+            </a:prstGeom>
+            <a:noFill/>
+            <a:ln w="19050">
+              <a:noFill/>
+            </a:ln>
+          </p:spPr>
+          <p:txBody>
+            <a:bodyPr wrap="square" rtlCol="0">
+              <a:spAutoFit/>
+            </a:bodyPr>
+            <a:lstStyle/>
+            <a:p>
+              <a:pPr algn="l"/>
+              <a:r>
+                <a:rPr kumimoji="1" lang="ja-JP" altLang="en-US" sz="3200" dirty="0">
+                  <a:solidFill>
+                    <a:schemeClr val="bg1"/>
+                  </a:solidFill>
+                </a:rPr>
+                <a:t>受賞歴</a:t>
+              </a:r>
+            </a:p>
+          </p:txBody>
+        </p:sp>
+        <p:sp>
+          <p:nvSpPr>
+            <p:cNvPr id="13" name="テキスト ボックス 12">
+              <a:extLst>
+                <a:ext uri="{FF2B5EF4-FFF2-40B4-BE49-F238E27FC236}">
+                  <a16:creationId xmlns:a16="http://schemas.microsoft.com/office/drawing/2014/main" id="{08ADFA30-CC22-A855-4ABF-1D0B81198D16}"/>
+                </a:ext>
+              </a:extLst>
+            </p:cNvPr>
+            <p:cNvSpPr txBox="1"/>
+            <p:nvPr/>
+          </p:nvSpPr>
+          <p:spPr>
+            <a:xfrm>
+              <a:off x="3657600" y="5693529"/>
+              <a:ext cx="8315632" cy="584775"/>
+            </a:xfrm>
+            <a:prstGeom prst="rect">
+              <a:avLst/>
+            </a:prstGeom>
+            <a:noFill/>
+            <a:ln w="19050">
+              <a:noFill/>
+            </a:ln>
+          </p:spPr>
+          <p:txBody>
+            <a:bodyPr wrap="square" rtlCol="0">
+              <a:spAutoFit/>
+            </a:bodyPr>
+            <a:lstStyle/>
+            <a:p>
+              <a:pPr algn="l"/>
+              <a:r>
+                <a:rPr kumimoji="1" lang="ja-JP" altLang="en-US" sz="3200" dirty="0">
+                  <a:solidFill>
+                    <a:schemeClr val="bg1"/>
+                  </a:solidFill>
+                </a:rPr>
+                <a:t>・ </a:t>
+              </a:r>
+              <a:r>
+                <a:rPr kumimoji="1" lang="en-US" altLang="ja-JP" sz="3200" dirty="0">
+                  <a:solidFill>
+                    <a:schemeClr val="bg1"/>
+                  </a:solidFill>
+                </a:rPr>
+                <a:t>Switch2D</a:t>
+              </a:r>
+              <a:r>
+                <a:rPr kumimoji="1" lang="ja-JP" altLang="en-US" sz="3200" dirty="0">
+                  <a:solidFill>
+                    <a:schemeClr val="bg1"/>
+                  </a:solidFill>
+                </a:rPr>
+                <a:t> ゲーム学内コンテスト　意欲賞</a:t>
+              </a:r>
+              <a:endParaRPr kumimoji="1" lang="en-US" altLang="ja-JP" sz="3200" dirty="0">
+                <a:solidFill>
+                  <a:schemeClr val="bg1"/>
+                </a:solidFill>
+              </a:endParaRPr>
+            </a:p>
+          </p:txBody>
+        </p:sp>
+      </p:grpSp>
+      <p:pic>
+        <p:nvPicPr>
+          <p:cNvPr id="15" name="図 14" descr="スーツを着ている男&#10;&#10;AI 生成コンテンツは誤りを含む可能性があります。">
+            <a:extLst>
+              <a:ext uri="{FF2B5EF4-FFF2-40B4-BE49-F238E27FC236}">
+                <a16:creationId xmlns:a16="http://schemas.microsoft.com/office/drawing/2014/main" id="{51FC75A5-E463-1536-5F7B-3BB75E358FAE}"/>
+              </a:ext>
+            </a:extLst>
+          </p:cNvPr>
+          <p:cNvPicPr>
+            <a:picLocks noChangeAspect="1"/>
+          </p:cNvPicPr>
           <p:nvPr/>
         </p:nvPicPr>
         <p:blipFill>
-          <a:blip r:embed="rId2" cstate="print"/>
+          <a:blip r:embed="rId2" cstate="print">
+            <a:extLst>
+              <a:ext uri="{28A0092B-C50C-407E-A947-70E740481C1C}">
+                <a14:useLocalDpi xmlns:a14="http://schemas.microsoft.com/office/drawing/2010/main" val="0"/>
+              </a:ext>
+            </a:extLst>
+          </a:blip>
           <a:stretch>
             <a:fillRect/>
           </a:stretch>
         </p:blipFill>
         <p:spPr>
           <a:xfrm>
-            <a:off x="8724782" y="353961"/>
-            <a:ext cx="3096050" cy="3995876"/>
+            <a:off x="633732" y="3197846"/>
+            <a:ext cx="2509610" cy="3554913"/>
           </a:xfrm>
           <a:prstGeom prst="rect">
             <a:avLst/>
           </a:prstGeom>
         </p:spPr>
       </p:pic>
+      <p:grpSp>
+        <p:nvGrpSpPr>
+          <p:cNvPr id="10" name="グループ化 9">
+            <a:extLst>
+              <a:ext uri="{FF2B5EF4-FFF2-40B4-BE49-F238E27FC236}">
+                <a16:creationId xmlns:a16="http://schemas.microsoft.com/office/drawing/2014/main" id="{556B2FBB-C750-A2F7-E14F-6D915127AACD}"/>
+              </a:ext>
+            </a:extLst>
+          </p:cNvPr>
+          <p:cNvGrpSpPr/>
+          <p:nvPr/>
+        </p:nvGrpSpPr>
+        <p:grpSpPr>
+          <a:xfrm>
+            <a:off x="6636322" y="1144037"/>
+            <a:ext cx="4271303" cy="1593966"/>
+            <a:chOff x="6636322" y="1144037"/>
+            <a:chExt cx="4271303" cy="1593966"/>
+          </a:xfrm>
+        </p:grpSpPr>
+        <p:sp>
+          <p:nvSpPr>
+            <p:cNvPr id="3" name="テキスト ボックス 2">
+              <a:extLst>
+                <a:ext uri="{FF2B5EF4-FFF2-40B4-BE49-F238E27FC236}">
+                  <a16:creationId xmlns:a16="http://schemas.microsoft.com/office/drawing/2014/main" id="{558FBD04-A28B-A5D1-C1D5-0A2B7B2BBCEB}"/>
+                </a:ext>
+              </a:extLst>
+            </p:cNvPr>
+            <p:cNvSpPr txBox="1"/>
+            <p:nvPr/>
+          </p:nvSpPr>
+          <p:spPr>
+            <a:xfrm>
+              <a:off x="6858000" y="1722340"/>
+              <a:ext cx="4049625" cy="1015663"/>
+            </a:xfrm>
+            <a:prstGeom prst="rect">
+              <a:avLst/>
+            </a:prstGeom>
+            <a:noFill/>
+            <a:ln w="19050">
+              <a:noFill/>
+            </a:ln>
+          </p:spPr>
+          <p:txBody>
+            <a:bodyPr wrap="square" rtlCol="0">
+              <a:spAutoFit/>
+            </a:bodyPr>
+            <a:lstStyle/>
+            <a:p>
+              <a:pPr algn="l"/>
+              <a:r>
+                <a:rPr kumimoji="1" lang="en-US" altLang="ja-JP" sz="2000" dirty="0">
+                  <a:solidFill>
+                    <a:schemeClr val="bg1"/>
+                  </a:solidFill>
+                </a:rPr>
+                <a:t>HAL</a:t>
+              </a:r>
+              <a:r>
+                <a:rPr kumimoji="1" lang="ja-JP" altLang="en-US" sz="2000" dirty="0">
+                  <a:solidFill>
+                    <a:schemeClr val="bg1"/>
+                  </a:solidFill>
+                </a:rPr>
+                <a:t>大阪 </a:t>
+              </a:r>
+              <a:endParaRPr kumimoji="1" lang="en-US" altLang="ja-JP" sz="2000" dirty="0">
+                <a:solidFill>
+                  <a:schemeClr val="bg1"/>
+                </a:solidFill>
+              </a:endParaRPr>
+            </a:p>
+            <a:p>
+              <a:pPr algn="l"/>
+              <a:r>
+                <a:rPr kumimoji="1" lang="ja-JP" altLang="en-US" sz="2000" dirty="0">
+                  <a:solidFill>
+                    <a:schemeClr val="bg1"/>
+                  </a:solidFill>
+                </a:rPr>
+                <a:t>ゲーム制作学科</a:t>
+              </a:r>
+              <a:r>
+                <a:rPr kumimoji="1" lang="en-US" altLang="ja-JP" sz="2000" dirty="0">
+                  <a:solidFill>
+                    <a:schemeClr val="bg1"/>
+                  </a:solidFill>
+                </a:rPr>
+                <a:t>4</a:t>
+              </a:r>
+              <a:r>
+                <a:rPr kumimoji="1" lang="ja-JP" altLang="en-US" sz="2000" dirty="0">
+                  <a:solidFill>
+                    <a:schemeClr val="bg1"/>
+                  </a:solidFill>
+                </a:rPr>
+                <a:t>年制</a:t>
+              </a:r>
+              <a:r>
+                <a:rPr kumimoji="1" lang="en-US" altLang="ja-JP" sz="2000" dirty="0">
+                  <a:solidFill>
+                    <a:schemeClr val="bg1"/>
+                  </a:solidFill>
+                </a:rPr>
+                <a:t>3</a:t>
+              </a:r>
+              <a:r>
+                <a:rPr kumimoji="1" lang="ja-JP" altLang="en-US" sz="2000" dirty="0">
+                  <a:solidFill>
+                    <a:schemeClr val="bg1"/>
+                  </a:solidFill>
+                </a:rPr>
+                <a:t>年</a:t>
+              </a:r>
+              <a:br>
+                <a:rPr kumimoji="1" lang="en-US" altLang="ja-JP" sz="2000" dirty="0">
+                  <a:solidFill>
+                    <a:schemeClr val="bg1"/>
+                  </a:solidFill>
+                </a:rPr>
+              </a:br>
+              <a:r>
+                <a:rPr kumimoji="1" lang="en-US" altLang="ja-JP" sz="2000" dirty="0">
+                  <a:solidFill>
+                    <a:schemeClr val="bg1"/>
+                  </a:solidFill>
+                </a:rPr>
+                <a:t>VR</a:t>
+              </a:r>
+              <a:r>
+                <a:rPr kumimoji="1" lang="ja-JP" altLang="en-US" sz="2000" dirty="0">
+                  <a:solidFill>
+                    <a:schemeClr val="bg1"/>
+                  </a:solidFill>
+                </a:rPr>
+                <a:t>・</a:t>
+              </a:r>
+              <a:r>
+                <a:rPr kumimoji="1" lang="en-US" altLang="ja-JP" sz="2000" dirty="0">
+                  <a:solidFill>
+                    <a:schemeClr val="bg1"/>
+                  </a:solidFill>
+                </a:rPr>
+                <a:t>3D</a:t>
+              </a:r>
+              <a:r>
+                <a:rPr kumimoji="1" lang="ja-JP" altLang="en-US" sz="2000" dirty="0">
+                  <a:solidFill>
+                    <a:schemeClr val="bg1"/>
+                  </a:solidFill>
+                </a:rPr>
+                <a:t>ゲームプログラマー専攻</a:t>
+              </a:r>
+            </a:p>
+          </p:txBody>
+        </p:sp>
+        <p:sp>
+          <p:nvSpPr>
+            <p:cNvPr id="17" name="テキスト ボックス 16">
+              <a:extLst>
+                <a:ext uri="{FF2B5EF4-FFF2-40B4-BE49-F238E27FC236}">
+                  <a16:creationId xmlns:a16="http://schemas.microsoft.com/office/drawing/2014/main" id="{7E9388A0-8B7D-A550-0BCA-BB8E204BB683}"/>
+                </a:ext>
+              </a:extLst>
+            </p:cNvPr>
+            <p:cNvSpPr txBox="1"/>
+            <p:nvPr/>
+          </p:nvSpPr>
+          <p:spPr>
+            <a:xfrm>
+              <a:off x="6636322" y="1144037"/>
+              <a:ext cx="1285567" cy="584775"/>
+            </a:xfrm>
+            <a:prstGeom prst="rect">
+              <a:avLst/>
+            </a:prstGeom>
+            <a:noFill/>
+          </p:spPr>
+          <p:txBody>
+            <a:bodyPr wrap="square">
+              <a:spAutoFit/>
+            </a:bodyPr>
+            <a:lstStyle/>
+            <a:p>
+              <a:pPr algn="ctr"/>
+              <a:r>
+                <a:rPr kumimoji="1" lang="ja-JP" altLang="en-US" sz="3200" dirty="0">
+                  <a:solidFill>
+                    <a:schemeClr val="bg1"/>
+                  </a:solidFill>
+                </a:rPr>
+                <a:t>所属</a:t>
+              </a:r>
+              <a:r>
+                <a:rPr kumimoji="1" lang="en-US" altLang="ja-JP" sz="3200" dirty="0">
+                  <a:solidFill>
+                    <a:schemeClr val="bg1"/>
+                  </a:solidFill>
+                </a:rPr>
+                <a:t> </a:t>
+              </a:r>
+              <a:endParaRPr lang="ja-JP" altLang="en-US" sz="3200" dirty="0"/>
+            </a:p>
+          </p:txBody>
+        </p:sp>
+      </p:grpSp>
+      <p:sp>
+        <p:nvSpPr>
+          <p:cNvPr id="18" name="テキスト ボックス 17">
+            <a:extLst>
+              <a:ext uri="{FF2B5EF4-FFF2-40B4-BE49-F238E27FC236}">
+                <a16:creationId xmlns:a16="http://schemas.microsoft.com/office/drawing/2014/main" id="{D563864F-E5B4-D5A9-6EA8-E003159F39C4}"/>
+              </a:ext>
+            </a:extLst>
+          </p:cNvPr>
+          <p:cNvSpPr txBox="1"/>
+          <p:nvPr/>
+        </p:nvSpPr>
+        <p:spPr>
+          <a:xfrm>
+            <a:off x="3560950" y="1512766"/>
+            <a:ext cx="2225741" cy="1639788"/>
+          </a:xfrm>
+          <a:prstGeom prst="cloudCallout">
+            <a:avLst>
+              <a:gd name="adj1" fmla="val -57057"/>
+              <a:gd name="adj2" fmla="val 56503"/>
+            </a:avLst>
+          </a:prstGeom>
+          <a:noFill/>
+          <a:ln w="19050" cap="rnd">
+            <a:solidFill>
+              <a:schemeClr val="bg1"/>
+            </a:solidFill>
+            <a:round/>
+            <a:extLst>
+              <a:ext uri="{C807C97D-BFC1-408E-A445-0C87EB9F89A2}">
+                <ask:lineSketchStyleProps xmlns:ask="http://schemas.microsoft.com/office/drawing/2018/sketchyshapes" sd="1219033472">
+                  <a:custGeom>
+                    <a:avLst/>
+                    <a:gdLst>
+                      <a:gd name="csX0" fmla="*/ 0 w 2225741"/>
+                      <a:gd name="csY0" fmla="*/ 0 h 584775"/>
+                      <a:gd name="csX1" fmla="*/ 534178 w 2225741"/>
+                      <a:gd name="csY1" fmla="*/ 0 h 584775"/>
+                      <a:gd name="csX2" fmla="*/ 1023841 w 2225741"/>
+                      <a:gd name="csY2" fmla="*/ 0 h 584775"/>
+                      <a:gd name="csX3" fmla="*/ 1624791 w 2225741"/>
+                      <a:gd name="csY3" fmla="*/ 0 h 584775"/>
+                      <a:gd name="csX4" fmla="*/ 2225741 w 2225741"/>
+                      <a:gd name="csY4" fmla="*/ 0 h 584775"/>
+                      <a:gd name="csX5" fmla="*/ 2225741 w 2225741"/>
+                      <a:gd name="csY5" fmla="*/ 584775 h 584775"/>
+                      <a:gd name="csX6" fmla="*/ 1713821 w 2225741"/>
+                      <a:gd name="csY6" fmla="*/ 584775 h 584775"/>
+                      <a:gd name="csX7" fmla="*/ 1201900 w 2225741"/>
+                      <a:gd name="csY7" fmla="*/ 584775 h 584775"/>
+                      <a:gd name="csX8" fmla="*/ 600950 w 2225741"/>
+                      <a:gd name="csY8" fmla="*/ 584775 h 584775"/>
+                      <a:gd name="csX9" fmla="*/ 0 w 2225741"/>
+                      <a:gd name="csY9" fmla="*/ 584775 h 584775"/>
+                      <a:gd name="csX10" fmla="*/ 0 w 2225741"/>
+                      <a:gd name="csY10" fmla="*/ 0 h 584775"/>
+                    </a:gdLst>
+                    <a:ahLst/>
+                    <a:cxnLst>
+                      <a:cxn ang="0">
+                        <a:pos x="csX0" y="csY0"/>
+                      </a:cxn>
+                      <a:cxn ang="0">
+                        <a:pos x="csX1" y="csY1"/>
+                      </a:cxn>
+                      <a:cxn ang="0">
+                        <a:pos x="csX2" y="csY2"/>
+                      </a:cxn>
+                      <a:cxn ang="0">
+                        <a:pos x="csX3" y="csY3"/>
+                      </a:cxn>
+                      <a:cxn ang="0">
+                        <a:pos x="csX4" y="csY4"/>
+                      </a:cxn>
+                      <a:cxn ang="0">
+                        <a:pos x="csX5" y="csY5"/>
+                      </a:cxn>
+                      <a:cxn ang="0">
+                        <a:pos x="csX6" y="csY6"/>
+                      </a:cxn>
+                      <a:cxn ang="0">
+                        <a:pos x="csX7" y="csY7"/>
+                      </a:cxn>
+                      <a:cxn ang="0">
+                        <a:pos x="csX8" y="csY8"/>
+                      </a:cxn>
+                      <a:cxn ang="0">
+                        <a:pos x="csX9" y="csY9"/>
+                      </a:cxn>
+                      <a:cxn ang="0">
+                        <a:pos x="csX10" y="csY10"/>
+                      </a:cxn>
+                    </a:cxnLst>
+                    <a:rect l="l" t="t" r="r" b="b"/>
+                    <a:pathLst>
+                      <a:path w="2225741" h="584775" extrusionOk="0">
+                        <a:moveTo>
+                          <a:pt x="0" y="0"/>
+                        </a:moveTo>
+                        <a:cubicBezTo>
+                          <a:pt x="114722" y="-13290"/>
+                          <a:pt x="364170" y="526"/>
+                          <a:pt x="534178" y="0"/>
+                        </a:cubicBezTo>
+                        <a:cubicBezTo>
+                          <a:pt x="704186" y="-526"/>
+                          <a:pt x="840631" y="52250"/>
+                          <a:pt x="1023841" y="0"/>
+                        </a:cubicBezTo>
+                        <a:cubicBezTo>
+                          <a:pt x="1207051" y="-52250"/>
+                          <a:pt x="1411576" y="49643"/>
+                          <a:pt x="1624791" y="0"/>
+                        </a:cubicBezTo>
+                        <a:cubicBezTo>
+                          <a:pt x="1838006" y="-49643"/>
+                          <a:pt x="1990849" y="16941"/>
+                          <a:pt x="2225741" y="0"/>
+                        </a:cubicBezTo>
+                        <a:cubicBezTo>
+                          <a:pt x="2232439" y="120638"/>
+                          <a:pt x="2217966" y="453480"/>
+                          <a:pt x="2225741" y="584775"/>
+                        </a:cubicBezTo>
+                        <a:cubicBezTo>
+                          <a:pt x="2034761" y="608292"/>
+                          <a:pt x="1900819" y="581450"/>
+                          <a:pt x="1713821" y="584775"/>
+                        </a:cubicBezTo>
+                        <a:cubicBezTo>
+                          <a:pt x="1526823" y="588100"/>
+                          <a:pt x="1345336" y="545361"/>
+                          <a:pt x="1201900" y="584775"/>
+                        </a:cubicBezTo>
+                        <a:cubicBezTo>
+                          <a:pt x="1058464" y="624189"/>
+                          <a:pt x="769088" y="514794"/>
+                          <a:pt x="600950" y="584775"/>
+                        </a:cubicBezTo>
+                        <a:cubicBezTo>
+                          <a:pt x="432812" y="654756"/>
+                          <a:pt x="173944" y="579064"/>
+                          <a:pt x="0" y="584775"/>
+                        </a:cubicBezTo>
+                        <a:cubicBezTo>
+                          <a:pt x="-7399" y="344304"/>
+                          <a:pt x="51418" y="249993"/>
+                          <a:pt x="0" y="0"/>
+                        </a:cubicBezTo>
+                        <a:close/>
+                      </a:path>
+                    </a:pathLst>
+                  </a:custGeom>
+                  <ask:type>
+                    <ask:lineSketchNone/>
+                  </ask:type>
+                </ask:lineSketchStyleProps>
+              </a:ext>
+            </a:extLst>
+          </a:ln>
+        </p:spPr>
+        <p:txBody>
+          <a:bodyPr wrap="square" rtlCol="0">
+            <a:spAutoFit/>
+          </a:bodyPr>
+          <a:lstStyle/>
+          <a:p>
+            <a:pPr algn="l"/>
+            <a:r>
+              <a:rPr kumimoji="1" lang="ja-JP" altLang="en-US" sz="3200" dirty="0">
+                <a:solidFill>
+                  <a:schemeClr val="bg1"/>
+                </a:solidFill>
+              </a:rPr>
+              <a:t>年齢</a:t>
+            </a:r>
+            <a:br>
+              <a:rPr kumimoji="1" lang="en-US" altLang="ja-JP" sz="3200" dirty="0">
+                <a:solidFill>
+                  <a:schemeClr val="bg1"/>
+                </a:solidFill>
+              </a:rPr>
+            </a:br>
+            <a:r>
+              <a:rPr kumimoji="1" lang="en-US" altLang="ja-JP" sz="3200" dirty="0">
+                <a:solidFill>
+                  <a:schemeClr val="bg1"/>
+                </a:solidFill>
+              </a:rPr>
+              <a:t>23</a:t>
+            </a:r>
+            <a:r>
+              <a:rPr kumimoji="1" lang="ja-JP" altLang="en-US" sz="3200" dirty="0">
+                <a:solidFill>
+                  <a:schemeClr val="bg1"/>
+                </a:solidFill>
+              </a:rPr>
+              <a:t>才</a:t>
+            </a:r>
+            <a:r>
+              <a:rPr kumimoji="1" lang="ja-JP" altLang="en-US" sz="3200" b="1" dirty="0">
+                <a:solidFill>
+                  <a:schemeClr val="bg1"/>
+                </a:solidFill>
+              </a:rPr>
+              <a:t> </a:t>
+            </a:r>
+            <a:endParaRPr kumimoji="1" lang="ja-JP" altLang="en-US" sz="3200" dirty="0">
+              <a:solidFill>
+                <a:schemeClr val="bg1"/>
+              </a:solidFill>
+            </a:endParaRPr>
+          </a:p>
+        </p:txBody>
+      </p:sp>
     </p:spTree>
     <p:extLst>
       <p:ext uri="{BB962C8B-B14F-4D97-AF65-F5344CB8AC3E}">
@@ -1873,6 +3163,513 @@
 </file>
 
 <file path=ppt/slides/slide4.xml><?xml version="1.0" encoding="utf-8"?>
+<p:sld xmlns:a="http://schemas.openxmlformats.org/drawingml/2006/main" xmlns:r="http://schemas.openxmlformats.org/officeDocument/2006/relationships" xmlns:p="http://schemas.openxmlformats.org/presentationml/2006/main">
+  <p:cSld>
+    <p:spTree>
+      <p:nvGrpSpPr>
+        <p:cNvPr id="1" name="">
+          <a:extLst>
+            <a:ext uri="{FF2B5EF4-FFF2-40B4-BE49-F238E27FC236}">
+              <a16:creationId xmlns:a16="http://schemas.microsoft.com/office/drawing/2014/main" id="{8E01BD7F-7262-3898-CE79-19684FF56773}"/>
+            </a:ext>
+          </a:extLst>
+        </p:cNvPr>
+        <p:cNvGrpSpPr/>
+        <p:nvPr/>
+      </p:nvGrpSpPr>
+      <p:grpSpPr>
+        <a:xfrm>
+          <a:off x="0" y="0"/>
+          <a:ext cx="0" cy="0"/>
+          <a:chOff x="0" y="0"/>
+          <a:chExt cx="0" cy="0"/>
+        </a:xfrm>
+      </p:grpSpPr>
+      <p:sp>
+        <p:nvSpPr>
+          <p:cNvPr id="8" name="正方形/長方形 7">
+            <a:extLst>
+              <a:ext uri="{FF2B5EF4-FFF2-40B4-BE49-F238E27FC236}">
+                <a16:creationId xmlns:a16="http://schemas.microsoft.com/office/drawing/2014/main" id="{871EA725-3FEE-B97F-53CC-ABD9A779743C}"/>
+              </a:ext>
+            </a:extLst>
+          </p:cNvPr>
+          <p:cNvSpPr/>
+          <p:nvPr/>
+        </p:nvSpPr>
+        <p:spPr>
+          <a:xfrm>
+            <a:off x="2514600" y="3810000"/>
+            <a:ext cx="9468792" cy="2514600"/>
+          </a:xfrm>
+          <a:prstGeom prst="rect">
+            <a:avLst/>
+          </a:prstGeom>
+          <a:noFill/>
+          <a:ln>
+            <a:solidFill>
+              <a:schemeClr val="bg1"/>
+            </a:solidFill>
+          </a:ln>
+        </p:spPr>
+        <p:style>
+          <a:lnRef idx="2">
+            <a:schemeClr val="accent1">
+              <a:shade val="15000"/>
+            </a:schemeClr>
+          </a:lnRef>
+          <a:fillRef idx="1">
+            <a:schemeClr val="accent1"/>
+          </a:fillRef>
+          <a:effectRef idx="0">
+            <a:schemeClr val="accent1"/>
+          </a:effectRef>
+          <a:fontRef idx="minor">
+            <a:schemeClr val="lt1"/>
+          </a:fontRef>
+        </p:style>
+        <p:txBody>
+          <a:bodyPr rtlCol="0" anchor="ctr"/>
+          <a:lstStyle/>
+          <a:p>
+            <a:pPr algn="ctr"/>
+            <a:endParaRPr kumimoji="1" lang="ja-JP" altLang="en-US"/>
+          </a:p>
+        </p:txBody>
+      </p:sp>
+      <p:sp>
+        <p:nvSpPr>
+          <p:cNvPr id="2" name="タイトル 1">
+            <a:extLst>
+              <a:ext uri="{FF2B5EF4-FFF2-40B4-BE49-F238E27FC236}">
+                <a16:creationId xmlns:a16="http://schemas.microsoft.com/office/drawing/2014/main" id="{E3FB435E-5CEA-AF01-B119-F421D1CBFD48}"/>
+              </a:ext>
+            </a:extLst>
+          </p:cNvPr>
+          <p:cNvSpPr>
+            <a:spLocks noGrp="1"/>
+          </p:cNvSpPr>
+          <p:nvPr>
+            <p:ph type="title"/>
+          </p:nvPr>
+        </p:nvSpPr>
+        <p:spPr>
+          <a:xfrm>
+            <a:off x="371168" y="390832"/>
+            <a:ext cx="7287259" cy="923330"/>
+          </a:xfrm>
+        </p:spPr>
+        <p:txBody>
+          <a:bodyPr/>
+          <a:lstStyle/>
+          <a:p>
+            <a:r>
+              <a:rPr kumimoji="1" lang="ja-JP" altLang="en-US" sz="6000" dirty="0"/>
+              <a:t>人物像</a:t>
+            </a:r>
+          </a:p>
+        </p:txBody>
+      </p:sp>
+      <p:sp>
+        <p:nvSpPr>
+          <p:cNvPr id="5" name="テキスト ボックス 4">
+            <a:extLst>
+              <a:ext uri="{FF2B5EF4-FFF2-40B4-BE49-F238E27FC236}">
+                <a16:creationId xmlns:a16="http://schemas.microsoft.com/office/drawing/2014/main" id="{E5B3F893-C68A-C120-BAEC-0D93A162FAEF}"/>
+              </a:ext>
+            </a:extLst>
+          </p:cNvPr>
+          <p:cNvSpPr txBox="1"/>
+          <p:nvPr/>
+        </p:nvSpPr>
+        <p:spPr>
+          <a:xfrm>
+            <a:off x="2524760" y="4572000"/>
+            <a:ext cx="9468792" cy="1569660"/>
+          </a:xfrm>
+          <a:prstGeom prst="rect">
+            <a:avLst/>
+          </a:prstGeom>
+          <a:noFill/>
+          <a:ln w="19050">
+            <a:noFill/>
+          </a:ln>
+        </p:spPr>
+        <p:txBody>
+          <a:bodyPr wrap="square" rtlCol="0">
+            <a:spAutoFit/>
+          </a:bodyPr>
+          <a:lstStyle/>
+          <a:p>
+            <a:pPr algn="l"/>
+            <a:r>
+              <a:rPr lang="ja-JP" altLang="en-US" sz="2400" dirty="0">
+                <a:solidFill>
+                  <a:schemeClr val="bg1"/>
+                </a:solidFill>
+              </a:rPr>
+              <a:t>・ ツール開発を通して</a:t>
+            </a:r>
+            <a:r>
+              <a:rPr lang="ja-JP" altLang="en-US" sz="2400" u="sng" dirty="0">
+                <a:solidFill>
+                  <a:srgbClr val="FF0000"/>
+                </a:solidFill>
+              </a:rPr>
+              <a:t>チーム全体の生産性を高められる</a:t>
+            </a:r>
+            <a:br>
+              <a:rPr lang="en-US" altLang="ja-JP" sz="2400" u="sng" dirty="0">
+                <a:solidFill>
+                  <a:srgbClr val="FF0000"/>
+                </a:solidFill>
+              </a:rPr>
+            </a:br>
+            <a:r>
+              <a:rPr lang="ja-JP" altLang="en-US" sz="2400" dirty="0">
+                <a:solidFill>
+                  <a:srgbClr val="FF0000"/>
+                </a:solidFill>
+              </a:rPr>
+              <a:t>　 </a:t>
+            </a:r>
+            <a:r>
+              <a:rPr lang="ja-JP" altLang="en-US" sz="2400" u="sng" dirty="0">
+                <a:solidFill>
+                  <a:srgbClr val="FF0000"/>
+                </a:solidFill>
+              </a:rPr>
+              <a:t>エンジニア</a:t>
+            </a:r>
+            <a:r>
+              <a:rPr lang="ja-JP" altLang="en-US" sz="2400" dirty="0">
+                <a:solidFill>
+                  <a:schemeClr val="bg1"/>
+                </a:solidFill>
+              </a:rPr>
+              <a:t>を目指しています。</a:t>
+            </a:r>
+            <a:br>
+              <a:rPr lang="en-US" altLang="ja-JP" sz="2400" dirty="0">
+                <a:solidFill>
+                  <a:schemeClr val="bg1"/>
+                </a:solidFill>
+              </a:rPr>
+            </a:br>
+            <a:r>
+              <a:rPr lang="ja-JP" altLang="en-US" sz="2400" dirty="0">
+                <a:solidFill>
+                  <a:schemeClr val="bg1"/>
+                </a:solidFill>
+              </a:rPr>
+              <a:t>・ 将来的には、サーバーなどの知識も習得し、分野を越えて</a:t>
+            </a:r>
+            <a:br>
+              <a:rPr lang="en-US" altLang="ja-JP" sz="2400" dirty="0">
+                <a:solidFill>
+                  <a:schemeClr val="bg1"/>
+                </a:solidFill>
+              </a:rPr>
+            </a:br>
+            <a:r>
+              <a:rPr lang="ja-JP" altLang="en-US" sz="2400" dirty="0">
+                <a:solidFill>
+                  <a:schemeClr val="bg1"/>
+                </a:solidFill>
+              </a:rPr>
+              <a:t>　 </a:t>
+            </a:r>
+            <a:r>
+              <a:rPr lang="ja-JP" altLang="en-US" sz="2400" u="sng" dirty="0">
+                <a:solidFill>
+                  <a:srgbClr val="FF0000"/>
+                </a:solidFill>
+              </a:rPr>
+              <a:t>多くの人をつなげられるエンジニア</a:t>
+            </a:r>
+            <a:r>
+              <a:rPr lang="ja-JP" altLang="en-US" sz="2400" dirty="0">
+                <a:solidFill>
+                  <a:schemeClr val="bg1"/>
+                </a:solidFill>
+              </a:rPr>
+              <a:t>になりたいと考えています。</a:t>
+            </a:r>
+            <a:endParaRPr kumimoji="1" lang="ja-JP" altLang="en-US" sz="2400" dirty="0">
+              <a:solidFill>
+                <a:schemeClr val="bg1"/>
+              </a:solidFill>
+            </a:endParaRPr>
+          </a:p>
+        </p:txBody>
+      </p:sp>
+      <p:sp>
+        <p:nvSpPr>
+          <p:cNvPr id="4" name="テキスト ボックス 3">
+            <a:extLst>
+              <a:ext uri="{FF2B5EF4-FFF2-40B4-BE49-F238E27FC236}">
+                <a16:creationId xmlns:a16="http://schemas.microsoft.com/office/drawing/2014/main" id="{6A1D5119-20BE-EF13-254E-A824C29C28B8}"/>
+              </a:ext>
+            </a:extLst>
+          </p:cNvPr>
+          <p:cNvSpPr txBox="1"/>
+          <p:nvPr/>
+        </p:nvSpPr>
+        <p:spPr>
+          <a:xfrm>
+            <a:off x="2514600" y="3886200"/>
+            <a:ext cx="3962400" cy="584775"/>
+          </a:xfrm>
+          <a:prstGeom prst="rect">
+            <a:avLst/>
+          </a:prstGeom>
+          <a:noFill/>
+          <a:ln w="19050">
+            <a:noFill/>
+          </a:ln>
+        </p:spPr>
+        <p:txBody>
+          <a:bodyPr wrap="square" rtlCol="0">
+            <a:spAutoFit/>
+          </a:bodyPr>
+          <a:lstStyle/>
+          <a:p>
+            <a:pPr algn="l"/>
+            <a:r>
+              <a:rPr kumimoji="1" lang="ja-JP" altLang="en-US" sz="3200" b="1" u="sng" dirty="0">
+                <a:solidFill>
+                  <a:schemeClr val="bg1"/>
+                </a:solidFill>
+              </a:rPr>
+              <a:t>目指すエンジニア像</a:t>
+            </a:r>
+          </a:p>
+        </p:txBody>
+      </p:sp>
+      <p:sp>
+        <p:nvSpPr>
+          <p:cNvPr id="10" name="正方形/長方形 9">
+            <a:extLst>
+              <a:ext uri="{FF2B5EF4-FFF2-40B4-BE49-F238E27FC236}">
+                <a16:creationId xmlns:a16="http://schemas.microsoft.com/office/drawing/2014/main" id="{EE94D708-A881-C2AE-B33D-F15A22BAE3CF}"/>
+              </a:ext>
+            </a:extLst>
+          </p:cNvPr>
+          <p:cNvSpPr/>
+          <p:nvPr/>
+        </p:nvSpPr>
+        <p:spPr>
+          <a:xfrm>
+            <a:off x="2499360" y="1663987"/>
+            <a:ext cx="9468792" cy="1616998"/>
+          </a:xfrm>
+          <a:prstGeom prst="rect">
+            <a:avLst/>
+          </a:prstGeom>
+          <a:noFill/>
+          <a:ln>
+            <a:solidFill>
+              <a:schemeClr val="bg1"/>
+            </a:solidFill>
+          </a:ln>
+        </p:spPr>
+        <p:style>
+          <a:lnRef idx="2">
+            <a:schemeClr val="accent1">
+              <a:shade val="15000"/>
+            </a:schemeClr>
+          </a:lnRef>
+          <a:fillRef idx="1">
+            <a:schemeClr val="accent1"/>
+          </a:fillRef>
+          <a:effectRef idx="0">
+            <a:schemeClr val="accent1"/>
+          </a:effectRef>
+          <a:fontRef idx="minor">
+            <a:schemeClr val="lt1"/>
+          </a:fontRef>
+        </p:style>
+        <p:txBody>
+          <a:bodyPr rtlCol="0" anchor="ctr"/>
+          <a:lstStyle/>
+          <a:p>
+            <a:pPr algn="ctr"/>
+            <a:endParaRPr kumimoji="1" lang="ja-JP" altLang="en-US"/>
+          </a:p>
+        </p:txBody>
+      </p:sp>
+      <p:sp>
+        <p:nvSpPr>
+          <p:cNvPr id="11" name="テキスト ボックス 10">
+            <a:extLst>
+              <a:ext uri="{FF2B5EF4-FFF2-40B4-BE49-F238E27FC236}">
+                <a16:creationId xmlns:a16="http://schemas.microsoft.com/office/drawing/2014/main" id="{DD9D5CD3-81A1-50F6-98EB-6C972DD5B420}"/>
+              </a:ext>
+            </a:extLst>
+          </p:cNvPr>
+          <p:cNvSpPr txBox="1"/>
+          <p:nvPr/>
+        </p:nvSpPr>
+        <p:spPr>
+          <a:xfrm>
+            <a:off x="2499360" y="2378589"/>
+            <a:ext cx="9306232" cy="830997"/>
+          </a:xfrm>
+          <a:prstGeom prst="rect">
+            <a:avLst/>
+          </a:prstGeom>
+          <a:noFill/>
+          <a:ln w="19050">
+            <a:noFill/>
+          </a:ln>
+        </p:spPr>
+        <p:txBody>
+          <a:bodyPr wrap="square" rtlCol="0">
+            <a:spAutoFit/>
+          </a:bodyPr>
+          <a:lstStyle/>
+          <a:p>
+            <a:pPr algn="l"/>
+            <a:r>
+              <a:rPr lang="ja-JP" altLang="en-US" sz="2400" dirty="0">
+                <a:solidFill>
+                  <a:schemeClr val="bg1"/>
+                </a:solidFill>
+              </a:rPr>
+              <a:t>・ </a:t>
+            </a:r>
+            <a:r>
+              <a:rPr lang="ja-JP" altLang="en-US" sz="2400" u="sng" dirty="0">
+                <a:solidFill>
+                  <a:srgbClr val="FF0000"/>
+                </a:solidFill>
+              </a:rPr>
+              <a:t>メンバーが進んで行わない作業を率先して行う</a:t>
+            </a:r>
+            <a:r>
+              <a:rPr lang="ja-JP" altLang="en-US" sz="2400" dirty="0">
+                <a:solidFill>
+                  <a:schemeClr val="bg1"/>
+                </a:solidFill>
+              </a:rPr>
+              <a:t>ことで、</a:t>
+            </a:r>
+            <a:br>
+              <a:rPr lang="en-US" altLang="ja-JP" sz="2400" dirty="0">
+                <a:solidFill>
+                  <a:schemeClr val="bg1"/>
+                </a:solidFill>
+              </a:rPr>
+            </a:br>
+            <a:r>
+              <a:rPr lang="ja-JP" altLang="en-US" sz="2400" dirty="0">
+                <a:solidFill>
+                  <a:schemeClr val="bg1"/>
+                </a:solidFill>
+              </a:rPr>
+              <a:t>　 開発を円滑に進めることを大切にしています。</a:t>
+            </a:r>
+            <a:endParaRPr kumimoji="1" lang="ja-JP" altLang="en-US" sz="2400" dirty="0">
+              <a:solidFill>
+                <a:schemeClr val="bg1"/>
+              </a:solidFill>
+            </a:endParaRPr>
+          </a:p>
+        </p:txBody>
+      </p:sp>
+      <p:sp>
+        <p:nvSpPr>
+          <p:cNvPr id="14" name="テキスト ボックス 13">
+            <a:extLst>
+              <a:ext uri="{FF2B5EF4-FFF2-40B4-BE49-F238E27FC236}">
+                <a16:creationId xmlns:a16="http://schemas.microsoft.com/office/drawing/2014/main" id="{12A375B7-A62D-53C1-2C84-A455B26E219D}"/>
+              </a:ext>
+            </a:extLst>
+          </p:cNvPr>
+          <p:cNvSpPr txBox="1"/>
+          <p:nvPr/>
+        </p:nvSpPr>
+        <p:spPr>
+          <a:xfrm>
+            <a:off x="2499360" y="1740187"/>
+            <a:ext cx="6359832" cy="584775"/>
+          </a:xfrm>
+          <a:prstGeom prst="rect">
+            <a:avLst/>
+          </a:prstGeom>
+          <a:noFill/>
+          <a:ln w="19050">
+            <a:noFill/>
+          </a:ln>
+        </p:spPr>
+        <p:txBody>
+          <a:bodyPr wrap="square" rtlCol="0">
+            <a:spAutoFit/>
+          </a:bodyPr>
+          <a:lstStyle/>
+          <a:p>
+            <a:pPr algn="l"/>
+            <a:r>
+              <a:rPr kumimoji="1" lang="ja-JP" altLang="en-US" sz="3200" b="1" u="sng" dirty="0">
+                <a:solidFill>
+                  <a:schemeClr val="bg1"/>
+                </a:solidFill>
+              </a:rPr>
+              <a:t>チーム制作で大事にしていること</a:t>
+            </a:r>
+          </a:p>
+        </p:txBody>
+      </p:sp>
+      <p:pic>
+        <p:nvPicPr>
+          <p:cNvPr id="6" name="図 5" descr="野球のユニフォームを着た男性&#10;&#10;AI 生成コンテンツは誤りを含む可能性があります。">
+            <a:extLst>
+              <a:ext uri="{FF2B5EF4-FFF2-40B4-BE49-F238E27FC236}">
+                <a16:creationId xmlns:a16="http://schemas.microsoft.com/office/drawing/2014/main" id="{1F875A5A-43F6-A194-4BA4-46D5C4FC66B2}"/>
+              </a:ext>
+            </a:extLst>
+          </p:cNvPr>
+          <p:cNvPicPr>
+            <a:picLocks noChangeAspect="1"/>
+          </p:cNvPicPr>
+          <p:nvPr/>
+        </p:nvPicPr>
+        <p:blipFill>
+          <a:blip r:embed="rId2">
+            <a:extLst>
+              <a:ext uri="{28A0092B-C50C-407E-A947-70E740481C1C}">
+                <a14:useLocalDpi xmlns:a14="http://schemas.microsoft.com/office/drawing/2010/main" val="0"/>
+              </a:ext>
+            </a:extLst>
+          </a:blip>
+          <a:stretch>
+            <a:fillRect/>
+          </a:stretch>
+        </p:blipFill>
+        <p:spPr>
+          <a:xfrm>
+            <a:off x="371168" y="1524000"/>
+            <a:ext cx="1917005" cy="5041613"/>
+          </a:xfrm>
+          <a:prstGeom prst="rect">
+            <a:avLst/>
+          </a:prstGeom>
+        </p:spPr>
+      </p:pic>
+    </p:spTree>
+    <p:extLst>
+      <p:ext uri="{BB962C8B-B14F-4D97-AF65-F5344CB8AC3E}">
+        <p14:creationId xmlns:p14="http://schemas.microsoft.com/office/powerpoint/2010/main" val="3976079551"/>
+      </p:ext>
+    </p:extLst>
+  </p:cSld>
+  <p:clrMapOvr>
+    <a:masterClrMapping/>
+  </p:clrMapOvr>
+</p:sld>
+</file>
+
+<file path=ppt/slides/slide5.xml><?xml version="1.0" encoding="utf-8"?>
 <p:sld xmlns:a="http://schemas.openxmlformats.org/drawingml/2006/main" xmlns:r="http://schemas.openxmlformats.org/officeDocument/2006/relationships" xmlns:p="http://schemas.openxmlformats.org/presentationml/2006/main">
   <p:cSld>
     <p:spTree>
@@ -1914,7 +3711,7 @@
         <p:spPr>
           <a:xfrm>
             <a:off x="371168" y="390833"/>
-            <a:ext cx="7706032" cy="923330"/>
+            <a:ext cx="9992032" cy="923330"/>
           </a:xfrm>
         </p:spPr>
         <p:txBody>
@@ -1923,17 +3720,25 @@
           <a:p>
             <a:r>
               <a:rPr kumimoji="1" lang="ja-JP" altLang="en-US" sz="6000" dirty="0"/>
-              <a:t>就職作品</a:t>
-            </a:r>
-          </a:p>
-        </p:txBody>
-      </p:sp>
-      <p:sp>
-        <p:nvSpPr>
-          <p:cNvPr id="7" name="テキスト ボックス 6">
+              <a:t>制作作品</a:t>
+            </a:r>
+            <a:r>
+              <a:rPr kumimoji="1" lang="ja-JP" altLang="en-US" sz="6000" u="none" dirty="0"/>
+              <a:t> </a:t>
+            </a:r>
+            <a:r>
+              <a:rPr kumimoji="1" lang="ja-JP" altLang="en-US" sz="6000" dirty="0"/>
+              <a:t>チーム制作作品①</a:t>
+            </a:r>
+          </a:p>
+        </p:txBody>
+      </p:sp>
+      <p:sp>
+        <p:nvSpPr>
+          <p:cNvPr id="4" name="テキスト ボックス 3">
             <a:extLst>
               <a:ext uri="{FF2B5EF4-FFF2-40B4-BE49-F238E27FC236}">
-                <a16:creationId xmlns:a16="http://schemas.microsoft.com/office/drawing/2014/main" id="{E8803B9C-B76A-6051-F6AD-89F91A570D24}"/>
+                <a16:creationId xmlns:a16="http://schemas.microsoft.com/office/drawing/2014/main" id="{0D1A9CBA-EED3-7126-7E8A-17D2A128C769}"/>
               </a:ext>
             </a:extLst>
           </p:cNvPr>
@@ -1942,162 +3747,633 @@
         </p:nvSpPr>
         <p:spPr>
           <a:xfrm>
-            <a:off x="371168" y="1670339"/>
-            <a:ext cx="2676832" cy="584775"/>
+            <a:off x="429973" y="4479342"/>
+            <a:ext cx="7978389" cy="1631216"/>
           </a:xfrm>
           <a:prstGeom prst="rect">
             <a:avLst/>
           </a:prstGeom>
           <a:noFill/>
           <a:ln w="19050">
+            <a:noFill/>
+          </a:ln>
+        </p:spPr>
+        <p:txBody>
+          <a:bodyPr wrap="square" rtlCol="0">
+            <a:spAutoFit/>
+          </a:bodyPr>
+          <a:lstStyle/>
+          <a:p>
+            <a:pPr algn="l"/>
+            <a:r>
+              <a:rPr kumimoji="1" lang="en-US" altLang="ja-JP" sz="2000" dirty="0">
+                <a:solidFill>
+                  <a:schemeClr val="bg1"/>
+                </a:solidFill>
+              </a:rPr>
+              <a:t>Steam</a:t>
+            </a:r>
+            <a:r>
+              <a:rPr kumimoji="1" lang="ja-JP" altLang="en-US" sz="2000" dirty="0">
+                <a:solidFill>
+                  <a:schemeClr val="bg1"/>
+                </a:solidFill>
+              </a:rPr>
+              <a:t>で出すパズルゲームとして</a:t>
+            </a:r>
+            <a:r>
+              <a:rPr kumimoji="1" lang="en-US" altLang="ja-JP" sz="2000" dirty="0">
+                <a:solidFill>
+                  <a:schemeClr val="bg1"/>
+                </a:solidFill>
+              </a:rPr>
+              <a:t>Unity</a:t>
+            </a:r>
+            <a:r>
+              <a:rPr kumimoji="1" lang="ja-JP" altLang="en-US" sz="2000" dirty="0">
+                <a:solidFill>
+                  <a:schemeClr val="bg1"/>
+                </a:solidFill>
+              </a:rPr>
+              <a:t>６を使用して制作しました。</a:t>
+            </a:r>
+            <a:endParaRPr kumimoji="1" lang="en-US" altLang="ja-JP" sz="2000" dirty="0">
+              <a:solidFill>
+                <a:schemeClr val="bg1"/>
+              </a:solidFill>
+            </a:endParaRPr>
+          </a:p>
+          <a:p>
+            <a:pPr algn="l"/>
+            <a:r>
+              <a:rPr kumimoji="1" lang="ja-JP" altLang="en-US" sz="2000" dirty="0">
+                <a:solidFill>
+                  <a:schemeClr val="bg1"/>
+                </a:solidFill>
+              </a:rPr>
+              <a:t>既存</a:t>
+            </a:r>
+            <a:r>
+              <a:rPr kumimoji="1" lang="en-US" altLang="ja-JP" sz="2000" dirty="0">
+                <a:solidFill>
+                  <a:schemeClr val="bg1"/>
+                </a:solidFill>
+              </a:rPr>
+              <a:t>IP</a:t>
+            </a:r>
+            <a:r>
+              <a:rPr kumimoji="1" lang="ja-JP" altLang="en-US" sz="2000" dirty="0">
+                <a:solidFill>
+                  <a:schemeClr val="bg1"/>
+                </a:solidFill>
+              </a:rPr>
+              <a:t>の新ジャンル開発という課題で制作したため、</a:t>
+            </a:r>
+            <a:endParaRPr kumimoji="1" lang="en-US" altLang="ja-JP" sz="2000" dirty="0">
+              <a:solidFill>
+                <a:schemeClr val="bg1"/>
+              </a:solidFill>
+            </a:endParaRPr>
+          </a:p>
+          <a:p>
+            <a:pPr algn="l"/>
+            <a:r>
+              <a:rPr kumimoji="1" lang="ja-JP" altLang="en-US" sz="2000" dirty="0">
+                <a:solidFill>
+                  <a:schemeClr val="bg1"/>
+                </a:solidFill>
+              </a:rPr>
+              <a:t>プレイヤーやオブジェクトのテクスチャを変更して載せています。</a:t>
+            </a:r>
+            <a:endParaRPr kumimoji="1" lang="en-US" altLang="ja-JP" sz="2000" dirty="0">
+              <a:solidFill>
+                <a:schemeClr val="bg1"/>
+              </a:solidFill>
+            </a:endParaRPr>
+          </a:p>
+          <a:p>
+            <a:pPr algn="l"/>
+            <a:endParaRPr kumimoji="1" lang="en-US" altLang="ja-JP" sz="2000" dirty="0">
+              <a:solidFill>
+                <a:schemeClr val="bg1"/>
+              </a:solidFill>
+            </a:endParaRPr>
+          </a:p>
+          <a:p>
+            <a:pPr algn="l"/>
+            <a:r>
+              <a:rPr kumimoji="1" lang="ja-JP" altLang="en-US" sz="2000" dirty="0">
+                <a:solidFill>
+                  <a:schemeClr val="bg1"/>
+                </a:solidFill>
+              </a:rPr>
+              <a:t>開始点と終了点をすべて結ぶゲームです。</a:t>
+            </a:r>
+            <a:endParaRPr kumimoji="1" lang="en-US" altLang="ja-JP" sz="2000" dirty="0">
+              <a:solidFill>
+                <a:schemeClr val="bg1"/>
+              </a:solidFill>
+            </a:endParaRPr>
+          </a:p>
+        </p:txBody>
+      </p:sp>
+      <p:sp>
+        <p:nvSpPr>
+          <p:cNvPr id="5" name="テキスト ボックス 4">
+            <a:extLst>
+              <a:ext uri="{FF2B5EF4-FFF2-40B4-BE49-F238E27FC236}">
+                <a16:creationId xmlns:a16="http://schemas.microsoft.com/office/drawing/2014/main" id="{1194FD0B-247F-90EB-D946-B509959CEF17}"/>
+              </a:ext>
+            </a:extLst>
+          </p:cNvPr>
+          <p:cNvSpPr txBox="1"/>
+          <p:nvPr/>
+        </p:nvSpPr>
+        <p:spPr>
+          <a:xfrm>
+            <a:off x="595601" y="1906558"/>
+            <a:ext cx="3287621" cy="584775"/>
+          </a:xfrm>
+          <a:prstGeom prst="rect">
+            <a:avLst/>
+          </a:prstGeom>
+          <a:noFill/>
+          <a:ln w="19050">
+            <a:noFill/>
+          </a:ln>
+        </p:spPr>
+        <p:txBody>
+          <a:bodyPr wrap="square" rtlCol="0">
+            <a:spAutoFit/>
+          </a:bodyPr>
+          <a:lstStyle/>
+          <a:p>
+            <a:pPr algn="l"/>
+            <a:r>
+              <a:rPr kumimoji="1" lang="ja-JP" altLang="en-US" sz="3200" b="1" u="sng" dirty="0">
+                <a:solidFill>
+                  <a:schemeClr val="bg1"/>
+                </a:solidFill>
+              </a:rPr>
+              <a:t>ゲームジャンル</a:t>
+            </a:r>
+          </a:p>
+        </p:txBody>
+      </p:sp>
+      <p:sp>
+        <p:nvSpPr>
+          <p:cNvPr id="16" name="テキスト ボックス 15">
+            <a:extLst>
+              <a:ext uri="{FF2B5EF4-FFF2-40B4-BE49-F238E27FC236}">
+                <a16:creationId xmlns:a16="http://schemas.microsoft.com/office/drawing/2014/main" id="{42C155CE-49F8-0882-3D08-CA438F6C6744}"/>
+              </a:ext>
+            </a:extLst>
+          </p:cNvPr>
+          <p:cNvSpPr txBox="1"/>
+          <p:nvPr/>
+        </p:nvSpPr>
+        <p:spPr>
+          <a:xfrm>
+            <a:off x="585210" y="3792154"/>
+            <a:ext cx="2298344" cy="584775"/>
+          </a:xfrm>
+          <a:prstGeom prst="rect">
+            <a:avLst/>
+          </a:prstGeom>
+          <a:noFill/>
+          <a:ln w="19050">
+            <a:noFill/>
+          </a:ln>
+        </p:spPr>
+        <p:txBody>
+          <a:bodyPr wrap="square" rtlCol="0">
+            <a:spAutoFit/>
+          </a:bodyPr>
+          <a:lstStyle/>
+          <a:p>
+            <a:pPr algn="ctr"/>
+            <a:r>
+              <a:rPr kumimoji="1" lang="ja-JP" altLang="en-US" sz="3200" b="1" u="sng" dirty="0">
+                <a:solidFill>
+                  <a:schemeClr val="bg1"/>
+                </a:solidFill>
+              </a:rPr>
+              <a:t>ゲーム概要</a:t>
+            </a:r>
+          </a:p>
+        </p:txBody>
+      </p:sp>
+      <p:sp>
+        <p:nvSpPr>
+          <p:cNvPr id="3" name="テキスト ボックス 2">
+            <a:extLst>
+              <a:ext uri="{FF2B5EF4-FFF2-40B4-BE49-F238E27FC236}">
+                <a16:creationId xmlns:a16="http://schemas.microsoft.com/office/drawing/2014/main" id="{5F89D54E-FD98-6549-1B44-BC7C8B4554F4}"/>
+              </a:ext>
+            </a:extLst>
+          </p:cNvPr>
+          <p:cNvSpPr txBox="1"/>
+          <p:nvPr/>
+        </p:nvSpPr>
+        <p:spPr>
+          <a:xfrm>
+            <a:off x="559769" y="2558375"/>
+            <a:ext cx="3419263" cy="400110"/>
+          </a:xfrm>
+          <a:prstGeom prst="rect">
+            <a:avLst/>
+          </a:prstGeom>
+          <a:noFill/>
+          <a:ln w="19050">
+            <a:noFill/>
+          </a:ln>
+        </p:spPr>
+        <p:txBody>
+          <a:bodyPr wrap="square" rtlCol="0">
+            <a:spAutoFit/>
+          </a:bodyPr>
+          <a:lstStyle/>
+          <a:p>
+            <a:pPr algn="ctr"/>
+            <a:r>
+              <a:rPr kumimoji="1" lang="en-US" altLang="ja-JP" sz="2000" dirty="0">
+                <a:solidFill>
+                  <a:schemeClr val="bg1"/>
+                </a:solidFill>
+              </a:rPr>
+              <a:t>2D</a:t>
+            </a:r>
+            <a:r>
+              <a:rPr kumimoji="1" lang="ja-JP" altLang="en-US" sz="2000" dirty="0">
+                <a:solidFill>
+                  <a:schemeClr val="bg1"/>
+                </a:solidFill>
+              </a:rPr>
+              <a:t>パズルアクションゲーム</a:t>
+            </a:r>
+            <a:endParaRPr kumimoji="1" lang="en-US" altLang="ja-JP" sz="2000" dirty="0">
+              <a:solidFill>
+                <a:schemeClr val="bg1"/>
+              </a:solidFill>
+            </a:endParaRPr>
+          </a:p>
+        </p:txBody>
+      </p:sp>
+      <p:sp>
+        <p:nvSpPr>
+          <p:cNvPr id="6" name="テキスト ボックス 5">
+            <a:extLst>
+              <a:ext uri="{FF2B5EF4-FFF2-40B4-BE49-F238E27FC236}">
+                <a16:creationId xmlns:a16="http://schemas.microsoft.com/office/drawing/2014/main" id="{81787C39-B59E-17ED-D056-D68751B5695C}"/>
+              </a:ext>
+            </a:extLst>
+          </p:cNvPr>
+          <p:cNvSpPr txBox="1"/>
+          <p:nvPr/>
+        </p:nvSpPr>
+        <p:spPr>
+          <a:xfrm>
+            <a:off x="5379009" y="1992450"/>
+            <a:ext cx="2036106" cy="584775"/>
+          </a:xfrm>
+          <a:prstGeom prst="rect">
+            <a:avLst/>
+          </a:prstGeom>
+          <a:noFill/>
+          <a:ln w="19050">
+            <a:noFill/>
+          </a:ln>
+        </p:spPr>
+        <p:txBody>
+          <a:bodyPr wrap="square" rtlCol="0">
+            <a:spAutoFit/>
+          </a:bodyPr>
+          <a:lstStyle/>
+          <a:p>
+            <a:pPr algn="l"/>
+            <a:r>
+              <a:rPr kumimoji="1" lang="ja-JP" altLang="en-US" sz="3200" b="1" u="sng" dirty="0">
+                <a:solidFill>
+                  <a:schemeClr val="bg1"/>
+                </a:solidFill>
+              </a:rPr>
+              <a:t>制作期間</a:t>
+            </a:r>
+          </a:p>
+        </p:txBody>
+      </p:sp>
+      <p:sp>
+        <p:nvSpPr>
+          <p:cNvPr id="7" name="テキスト ボックス 6">
+            <a:extLst>
+              <a:ext uri="{FF2B5EF4-FFF2-40B4-BE49-F238E27FC236}">
+                <a16:creationId xmlns:a16="http://schemas.microsoft.com/office/drawing/2014/main" id="{2CD90114-5C6A-4A59-315B-716C597B2A63}"/>
+              </a:ext>
+            </a:extLst>
+          </p:cNvPr>
+          <p:cNvSpPr txBox="1"/>
+          <p:nvPr/>
+        </p:nvSpPr>
+        <p:spPr>
+          <a:xfrm>
+            <a:off x="5379009" y="2605481"/>
+            <a:ext cx="1115877" cy="400110"/>
+          </a:xfrm>
+          <a:prstGeom prst="rect">
+            <a:avLst/>
+          </a:prstGeom>
+          <a:noFill/>
+          <a:ln w="19050">
+            <a:noFill/>
+          </a:ln>
+        </p:spPr>
+        <p:txBody>
+          <a:bodyPr wrap="square" rtlCol="0">
+            <a:spAutoFit/>
+          </a:bodyPr>
+          <a:lstStyle/>
+          <a:p>
+            <a:pPr algn="l"/>
+            <a:r>
+              <a:rPr kumimoji="1" lang="ja-JP" altLang="en-US" sz="2000" dirty="0">
+                <a:solidFill>
+                  <a:schemeClr val="bg1"/>
+                </a:solidFill>
+              </a:rPr>
+              <a:t>１カ月</a:t>
+            </a:r>
+            <a:endParaRPr kumimoji="1" lang="en-US" altLang="ja-JP" sz="2000" dirty="0">
+              <a:solidFill>
+                <a:schemeClr val="bg1"/>
+              </a:solidFill>
+            </a:endParaRPr>
+          </a:p>
+        </p:txBody>
+      </p:sp>
+      <p:sp>
+        <p:nvSpPr>
+          <p:cNvPr id="9" name="四角形: 角を丸くする 8">
+            <a:extLst>
+              <a:ext uri="{FF2B5EF4-FFF2-40B4-BE49-F238E27FC236}">
+                <a16:creationId xmlns:a16="http://schemas.microsoft.com/office/drawing/2014/main" id="{42C624E2-BD13-34CF-FE72-4229E0948E72}"/>
+              </a:ext>
+            </a:extLst>
+          </p:cNvPr>
+          <p:cNvSpPr/>
+          <p:nvPr/>
+        </p:nvSpPr>
+        <p:spPr>
+          <a:xfrm>
+            <a:off x="409953" y="1876412"/>
+            <a:ext cx="3768429" cy="1229842"/>
+          </a:xfrm>
+          <a:prstGeom prst="roundRect">
+            <a:avLst/>
+          </a:prstGeom>
+          <a:noFill/>
+          <a:ln>
             <a:solidFill>
               <a:schemeClr val="bg1"/>
             </a:solidFill>
           </a:ln>
         </p:spPr>
-        <p:txBody>
-          <a:bodyPr wrap="square" rtlCol="0">
-            <a:spAutoFit/>
-          </a:bodyPr>
+        <p:style>
+          <a:lnRef idx="2">
+            <a:schemeClr val="accent1">
+              <a:shade val="15000"/>
+            </a:schemeClr>
+          </a:lnRef>
+          <a:fillRef idx="1">
+            <a:schemeClr val="accent1"/>
+          </a:fillRef>
+          <a:effectRef idx="0">
+            <a:schemeClr val="accent1"/>
+          </a:effectRef>
+          <a:fontRef idx="minor">
+            <a:schemeClr val="lt1"/>
+          </a:fontRef>
+        </p:style>
+        <p:txBody>
+          <a:bodyPr rtlCol="0" anchor="ctr"/>
           <a:lstStyle/>
           <a:p>
-            <a:pPr algn="l"/>
-            <a:r>
-              <a:rPr kumimoji="1" lang="ja-JP" altLang="en-US" sz="3200" dirty="0">
-                <a:solidFill>
-                  <a:schemeClr val="bg1"/>
-                </a:solidFill>
-              </a:rPr>
-              <a:t>基本データ型</a:t>
-            </a:r>
-          </a:p>
-        </p:txBody>
-      </p:sp>
-      <p:sp>
-        <p:nvSpPr>
-          <p:cNvPr id="9" name="テキスト ボックス 8">
+            <a:pPr algn="ctr"/>
+            <a:endParaRPr kumimoji="1" lang="ja-JP" altLang="en-US"/>
+          </a:p>
+        </p:txBody>
+      </p:sp>
+      <p:pic>
+        <p:nvPicPr>
+          <p:cNvPr id="14" name="図 13" descr="草, 大きい, モニター, テーブル が含まれている画像&#10;&#10;AI 生成コンテンツは誤りを含む可能性があります。">
             <a:extLst>
               <a:ext uri="{FF2B5EF4-FFF2-40B4-BE49-F238E27FC236}">
-                <a16:creationId xmlns:a16="http://schemas.microsoft.com/office/drawing/2014/main" id="{11A88100-0725-4EDC-2BE3-779C7D19AAC8}"/>
+                <a16:creationId xmlns:a16="http://schemas.microsoft.com/office/drawing/2014/main" id="{2B548AB6-FD40-7A08-066E-65C0E9FFE92B}"/>
               </a:ext>
             </a:extLst>
           </p:cNvPr>
-          <p:cNvSpPr txBox="1"/>
+          <p:cNvPicPr>
+            <a:picLocks noChangeAspect="1"/>
+          </p:cNvPicPr>
+          <p:nvPr/>
+        </p:nvPicPr>
+        <p:blipFill>
+          <a:blip r:embed="rId3" cstate="print">
+            <a:extLst>
+              <a:ext uri="{28A0092B-C50C-407E-A947-70E740481C1C}">
+                <a14:useLocalDpi xmlns:a14="http://schemas.microsoft.com/office/drawing/2010/main" val="0"/>
+              </a:ext>
+            </a:extLst>
+          </a:blip>
+          <a:stretch>
+            <a:fillRect/>
+          </a:stretch>
+        </p:blipFill>
+        <p:spPr>
+          <a:xfrm rot="540000">
+            <a:off x="8270842" y="1606988"/>
+            <a:ext cx="3455396" cy="1957924"/>
+          </a:xfrm>
+          <a:prstGeom prst="rect">
+            <a:avLst/>
+          </a:prstGeom>
+        </p:spPr>
+      </p:pic>
+      <p:sp>
+        <p:nvSpPr>
+          <p:cNvPr id="22" name="四角形: 角を丸くする 21">
+            <a:extLst>
+              <a:ext uri="{FF2B5EF4-FFF2-40B4-BE49-F238E27FC236}">
+                <a16:creationId xmlns:a16="http://schemas.microsoft.com/office/drawing/2014/main" id="{E8A807F4-E1EE-E1FB-0088-0EEA7D10E007}"/>
+              </a:ext>
+            </a:extLst>
+          </p:cNvPr>
+          <p:cNvSpPr/>
           <p:nvPr/>
         </p:nvSpPr>
         <p:spPr>
           <a:xfrm>
-            <a:off x="371168" y="2255114"/>
-            <a:ext cx="10754032" cy="1200329"/>
-          </a:xfrm>
-          <a:prstGeom prst="rect">
+            <a:off x="5259373" y="1912588"/>
+            <a:ext cx="2275378" cy="1193666"/>
+          </a:xfrm>
+          <a:prstGeom prst="roundRect">
             <a:avLst/>
           </a:prstGeom>
           <a:noFill/>
           <a:ln>
-            <a:noFill/>
+            <a:solidFill>
+              <a:schemeClr val="bg1"/>
+            </a:solidFill>
           </a:ln>
         </p:spPr>
-        <p:txBody>
-          <a:bodyPr wrap="square" rtlCol="0">
-            <a:spAutoFit/>
-          </a:bodyPr>
+        <p:style>
+          <a:lnRef idx="2">
+            <a:schemeClr val="accent1">
+              <a:shade val="15000"/>
+            </a:schemeClr>
+          </a:lnRef>
+          <a:fillRef idx="1">
+            <a:schemeClr val="accent1"/>
+          </a:fillRef>
+          <a:effectRef idx="0">
+            <a:schemeClr val="accent1"/>
+          </a:effectRef>
+          <a:fontRef idx="minor">
+            <a:schemeClr val="lt1"/>
+          </a:fontRef>
+        </p:style>
+        <p:txBody>
+          <a:bodyPr rtlCol="0" anchor="ctr"/>
           <a:lstStyle/>
           <a:p>
-            <a:r>
-              <a:rPr kumimoji="1" lang="ja-JP" altLang="en-US" sz="2400" dirty="0">
-                <a:solidFill>
-                  <a:schemeClr val="bg1"/>
-                </a:solidFill>
-              </a:rPr>
-              <a:t>各</a:t>
-            </a:r>
-            <a:r>
-              <a:rPr kumimoji="1" lang="en-US" altLang="ja-JP" sz="2400" dirty="0">
-                <a:solidFill>
-                  <a:schemeClr val="bg1"/>
-                </a:solidFill>
-              </a:rPr>
-              <a:t>API</a:t>
-            </a:r>
-            <a:r>
-              <a:rPr kumimoji="1" lang="ja-JP" altLang="en-US" sz="2400" dirty="0">
-                <a:solidFill>
-                  <a:schemeClr val="bg1"/>
-                </a:solidFill>
-              </a:rPr>
-              <a:t>、</a:t>
-            </a:r>
-            <a:r>
-              <a:rPr kumimoji="1" lang="en-US" altLang="ja-JP" sz="2400" dirty="0">
-                <a:solidFill>
-                  <a:schemeClr val="bg1"/>
-                </a:solidFill>
-              </a:rPr>
-              <a:t>OS</a:t>
-            </a:r>
-            <a:r>
-              <a:rPr kumimoji="1" lang="ja-JP" altLang="en-US" sz="2400" dirty="0">
-                <a:solidFill>
-                  <a:schemeClr val="bg1"/>
-                </a:solidFill>
-              </a:rPr>
-              <a:t>ごとの差異を吸収するために自作数学・文字列ライブラリを作成</a:t>
-            </a:r>
-            <a:endParaRPr kumimoji="1" lang="en-US" altLang="ja-JP" sz="2400" dirty="0">
-              <a:solidFill>
-                <a:schemeClr val="bg1"/>
-              </a:solidFill>
-            </a:endParaRPr>
-          </a:p>
-          <a:p>
-            <a:r>
-              <a:rPr kumimoji="1" lang="ja-JP" altLang="en-US" sz="2400" dirty="0">
-                <a:solidFill>
-                  <a:schemeClr val="bg1"/>
-                </a:solidFill>
-              </a:rPr>
-              <a:t>数学ライブラリは計算処理のみ、プラットフォームに最適なものを使用</a:t>
-            </a:r>
-            <a:endParaRPr kumimoji="1" lang="en-US" altLang="ja-JP" sz="2400" dirty="0">
-              <a:solidFill>
-                <a:schemeClr val="bg1"/>
-              </a:solidFill>
-            </a:endParaRPr>
-          </a:p>
-          <a:p>
-            <a:r>
-              <a:rPr kumimoji="1" lang="ja-JP" altLang="en-US" sz="2400" dirty="0">
-                <a:solidFill>
-                  <a:schemeClr val="bg1"/>
-                </a:solidFill>
-              </a:rPr>
-              <a:t>文字列ライブラリはエンコードを</a:t>
-            </a:r>
-            <a:r>
-              <a:rPr kumimoji="1" lang="en-US" altLang="ja-JP" sz="2400" dirty="0">
-                <a:solidFill>
-                  <a:schemeClr val="bg1"/>
-                </a:solidFill>
-              </a:rPr>
-              <a:t>UTF-8</a:t>
-            </a:r>
-            <a:r>
-              <a:rPr kumimoji="1" lang="ja-JP" altLang="en-US" sz="2400" dirty="0">
-                <a:solidFill>
-                  <a:schemeClr val="bg1"/>
-                </a:solidFill>
-              </a:rPr>
-              <a:t>に統一して、差異を吸収しています。</a:t>
-            </a:r>
-            <a:endParaRPr kumimoji="1" lang="en-US" altLang="ja-JP" sz="2400" dirty="0">
-              <a:solidFill>
-                <a:schemeClr val="bg1"/>
-              </a:solidFill>
-            </a:endParaRPr>
-          </a:p>
-        </p:txBody>
-      </p:sp>
+            <a:pPr algn="ctr"/>
+            <a:endParaRPr kumimoji="1" lang="ja-JP" altLang="en-US"/>
+          </a:p>
+        </p:txBody>
+      </p:sp>
+      <p:sp>
+        <p:nvSpPr>
+          <p:cNvPr id="23" name="四角形: 角を丸くする 22">
+            <a:extLst>
+              <a:ext uri="{FF2B5EF4-FFF2-40B4-BE49-F238E27FC236}">
+                <a16:creationId xmlns:a16="http://schemas.microsoft.com/office/drawing/2014/main" id="{0BF16B27-36BC-F0AA-F62F-A7C1DB2F5874}"/>
+              </a:ext>
+            </a:extLst>
+          </p:cNvPr>
+          <p:cNvSpPr/>
+          <p:nvPr/>
+        </p:nvSpPr>
+        <p:spPr>
+          <a:xfrm>
+            <a:off x="375316" y="3630211"/>
+            <a:ext cx="8033046" cy="2836956"/>
+          </a:xfrm>
+          <a:prstGeom prst="roundRect">
+            <a:avLst/>
+          </a:prstGeom>
+          <a:noFill/>
+          <a:ln>
+            <a:solidFill>
+              <a:schemeClr val="bg1"/>
+            </a:solidFill>
+          </a:ln>
+        </p:spPr>
+        <p:style>
+          <a:lnRef idx="2">
+            <a:schemeClr val="accent1">
+              <a:shade val="15000"/>
+            </a:schemeClr>
+          </a:lnRef>
+          <a:fillRef idx="1">
+            <a:schemeClr val="accent1"/>
+          </a:fillRef>
+          <a:effectRef idx="0">
+            <a:schemeClr val="accent1"/>
+          </a:effectRef>
+          <a:fontRef idx="minor">
+            <a:schemeClr val="lt1"/>
+          </a:fontRef>
+        </p:style>
+        <p:txBody>
+          <a:bodyPr rtlCol="0" anchor="ctr"/>
+          <a:lstStyle/>
+          <a:p>
+            <a:pPr algn="ctr"/>
+            <a:endParaRPr kumimoji="1" lang="ja-JP" altLang="en-US"/>
+          </a:p>
+        </p:txBody>
+      </p:sp>
+      <p:pic>
+        <p:nvPicPr>
+          <p:cNvPr id="21" name="図 20" descr="ダイアグラム&#10;&#10;AI 生成コンテンツは誤りを含む可能性があります。">
+            <a:extLst>
+              <a:ext uri="{FF2B5EF4-FFF2-40B4-BE49-F238E27FC236}">
+                <a16:creationId xmlns:a16="http://schemas.microsoft.com/office/drawing/2014/main" id="{7BCF859D-6463-4056-E613-57AAC34A4B85}"/>
+              </a:ext>
+            </a:extLst>
+          </p:cNvPr>
+          <p:cNvPicPr>
+            <a:picLocks noChangeAspect="1"/>
+          </p:cNvPicPr>
+          <p:nvPr/>
+        </p:nvPicPr>
+        <p:blipFill>
+          <a:blip r:embed="rId4" cstate="print">
+            <a:extLst>
+              <a:ext uri="{28A0092B-C50C-407E-A947-70E740481C1C}">
+                <a14:useLocalDpi xmlns:a14="http://schemas.microsoft.com/office/drawing/2010/main" val="0"/>
+              </a:ext>
+            </a:extLst>
+          </a:blip>
+          <a:stretch>
+            <a:fillRect/>
+          </a:stretch>
+        </p:blipFill>
+        <p:spPr>
+          <a:xfrm rot="-540000">
+            <a:off x="9120913" y="3050528"/>
+            <a:ext cx="2914733" cy="1614417"/>
+          </a:xfrm>
+          <a:prstGeom prst="rect">
+            <a:avLst/>
+          </a:prstGeom>
+        </p:spPr>
+      </p:pic>
+      <p:pic>
+        <p:nvPicPr>
+          <p:cNvPr id="12" name="図 11" descr="ゲームの画面&#10;&#10;AI 生成コンテンツは誤りを含む可能性があります。">
+            <a:extLst>
+              <a:ext uri="{FF2B5EF4-FFF2-40B4-BE49-F238E27FC236}">
+                <a16:creationId xmlns:a16="http://schemas.microsoft.com/office/drawing/2014/main" id="{94DB9965-0788-BF85-18D0-451EE6C96B22}"/>
+              </a:ext>
+            </a:extLst>
+          </p:cNvPr>
+          <p:cNvPicPr>
+            <a:picLocks noChangeAspect="1"/>
+          </p:cNvPicPr>
+          <p:nvPr/>
+        </p:nvPicPr>
+        <p:blipFill>
+          <a:blip r:embed="rId5" cstate="print">
+            <a:extLst>
+              <a:ext uri="{28A0092B-C50C-407E-A947-70E740481C1C}">
+                <a14:useLocalDpi xmlns:a14="http://schemas.microsoft.com/office/drawing/2010/main" val="0"/>
+              </a:ext>
+            </a:extLst>
+          </a:blip>
+          <a:stretch>
+            <a:fillRect/>
+          </a:stretch>
+        </p:blipFill>
+        <p:spPr>
+          <a:xfrm rot="540000">
+            <a:off x="8742723" y="4584074"/>
+            <a:ext cx="3291131" cy="1850314"/>
+          </a:xfrm>
+          <a:prstGeom prst="rect">
+            <a:avLst/>
+          </a:prstGeom>
+        </p:spPr>
+      </p:pic>
     </p:spTree>
     <p:extLst>
       <p:ext uri="{BB962C8B-B14F-4D97-AF65-F5344CB8AC3E}">
@@ -2111,7 +4387,7 @@
 </p:sld>
 </file>
 
-<file path=ppt/slides/slide5.xml><?xml version="1.0" encoding="utf-8"?>
+<file path=ppt/slides/slide6.xml><?xml version="1.0" encoding="utf-8"?>
 <p:sld xmlns:a="http://schemas.openxmlformats.org/drawingml/2006/main" xmlns:r="http://schemas.openxmlformats.org/officeDocument/2006/relationships" xmlns:p="http://schemas.openxmlformats.org/presentationml/2006/main">
   <p:cSld>
     <p:spTree>
@@ -2119,7 +4395,7 @@
         <p:cNvPr id="1" name="">
           <a:extLst>
             <a:ext uri="{FF2B5EF4-FFF2-40B4-BE49-F238E27FC236}">
-              <a16:creationId xmlns:a16="http://schemas.microsoft.com/office/drawing/2014/main" id="{D272469C-9544-3EE0-2E53-A6F33783F7EE}"/>
+              <a16:creationId xmlns:a16="http://schemas.microsoft.com/office/drawing/2014/main" id="{CCB7A3FE-54A3-E3EF-1922-981513F72809}"/>
             </a:ext>
           </a:extLst>
         </p:cNvPr>
@@ -2139,7 +4415,7 @@
           <p:cNvPr id="2" name="タイトル 1">
             <a:extLst>
               <a:ext uri="{FF2B5EF4-FFF2-40B4-BE49-F238E27FC236}">
-                <a16:creationId xmlns:a16="http://schemas.microsoft.com/office/drawing/2014/main" id="{10C8A78A-FF1F-9D2E-2968-2EF9DD7DA8B2}"/>
+                <a16:creationId xmlns:a16="http://schemas.microsoft.com/office/drawing/2014/main" id="{17BC89AB-0512-692F-9B20-7FBC6EA152EF}"/>
               </a:ext>
             </a:extLst>
           </p:cNvPr>
@@ -2153,7 +4429,7 @@
         <p:spPr>
           <a:xfrm>
             <a:off x="371168" y="390833"/>
-            <a:ext cx="7706032" cy="923330"/>
+            <a:ext cx="9992032" cy="923330"/>
           </a:xfrm>
         </p:spPr>
         <p:txBody>
@@ -2162,17 +4438,25 @@
           <a:p>
             <a:r>
               <a:rPr kumimoji="1" lang="ja-JP" altLang="en-US" sz="6000" dirty="0"/>
-              <a:t>過去作品</a:t>
-            </a:r>
-          </a:p>
-        </p:txBody>
-      </p:sp>
-      <p:sp>
-        <p:nvSpPr>
-          <p:cNvPr id="7" name="テキスト ボックス 6">
+              <a:t>制作作品</a:t>
+            </a:r>
+            <a:r>
+              <a:rPr kumimoji="1" lang="ja-JP" altLang="en-US" sz="6000" u="none" dirty="0"/>
+              <a:t> </a:t>
+            </a:r>
+            <a:r>
+              <a:rPr kumimoji="1" lang="ja-JP" altLang="en-US" sz="6000" dirty="0"/>
+              <a:t>チーム制作作品①</a:t>
+            </a:r>
+          </a:p>
+        </p:txBody>
+      </p:sp>
+      <p:sp>
+        <p:nvSpPr>
+          <p:cNvPr id="17" name="テキスト ボックス 16">
             <a:extLst>
               <a:ext uri="{FF2B5EF4-FFF2-40B4-BE49-F238E27FC236}">
-                <a16:creationId xmlns:a16="http://schemas.microsoft.com/office/drawing/2014/main" id="{1AE956C6-E1AE-1739-4416-F70FE41DE4BB}"/>
+                <a16:creationId xmlns:a16="http://schemas.microsoft.com/office/drawing/2014/main" id="{95529F04-B222-2947-717D-D0D8D573E6B5}"/>
               </a:ext>
             </a:extLst>
           </p:cNvPr>
@@ -2181,17 +4465,15 @@
         </p:nvSpPr>
         <p:spPr>
           <a:xfrm>
-            <a:off x="371168" y="1670339"/>
-            <a:ext cx="5191432" cy="584775"/>
+            <a:off x="371167" y="2057400"/>
+            <a:ext cx="9077633" cy="4154984"/>
           </a:xfrm>
           <a:prstGeom prst="rect">
             <a:avLst/>
           </a:prstGeom>
           <a:noFill/>
           <a:ln w="19050">
-            <a:solidFill>
-              <a:schemeClr val="bg1"/>
-            </a:solidFill>
+            <a:noFill/>
           </a:ln>
         </p:spPr>
         <p:txBody>
@@ -2202,22 +4484,230 @@
           <a:p>
             <a:pPr algn="l"/>
             <a:r>
-              <a:rPr kumimoji="1" lang="ja-JP" altLang="en-US" sz="3200" dirty="0">
-                <a:solidFill>
-                  <a:schemeClr val="bg1"/>
-                </a:solidFill>
-              </a:rPr>
-              <a:t>リソース管理マネージャー</a:t>
-            </a:r>
-          </a:p>
-        </p:txBody>
-      </p:sp>
-      <p:sp>
-        <p:nvSpPr>
-          <p:cNvPr id="9" name="テキスト ボックス 8">
+              <a:rPr kumimoji="1" lang="ja-JP" altLang="en-US" sz="2400" dirty="0">
+                <a:solidFill>
+                  <a:schemeClr val="bg1"/>
+                </a:solidFill>
+              </a:rPr>
+              <a:t>・ </a:t>
+            </a:r>
+            <a:r>
+              <a:rPr kumimoji="1" lang="en-US" altLang="ja-JP" sz="2400" dirty="0">
+                <a:solidFill>
+                  <a:schemeClr val="bg1"/>
+                </a:solidFill>
+              </a:rPr>
+              <a:t>.CSV</a:t>
+            </a:r>
+            <a:r>
+              <a:rPr kumimoji="1" lang="ja-JP" altLang="en-US" sz="2400" dirty="0">
+                <a:solidFill>
+                  <a:schemeClr val="bg1"/>
+                </a:solidFill>
+              </a:rPr>
+              <a:t>をエディター上で読み込み</a:t>
+            </a:r>
+            <a:endParaRPr kumimoji="1" lang="en-US" altLang="ja-JP" sz="2400" dirty="0">
+              <a:solidFill>
+                <a:schemeClr val="bg1"/>
+              </a:solidFill>
+            </a:endParaRPr>
+          </a:p>
+          <a:p>
+            <a:pPr algn="l"/>
+            <a:r>
+              <a:rPr kumimoji="1" lang="ja-JP" altLang="en-US" sz="2400" dirty="0">
+                <a:solidFill>
+                  <a:schemeClr val="bg1"/>
+                </a:solidFill>
+              </a:rPr>
+              <a:t>・ シーン遷移・フェードエフェクト・サウンドマネージャー</a:t>
+            </a:r>
+            <a:endParaRPr kumimoji="1" lang="en-US" altLang="ja-JP" sz="2400" dirty="0">
+              <a:solidFill>
+                <a:schemeClr val="bg1"/>
+              </a:solidFill>
+            </a:endParaRPr>
+          </a:p>
+          <a:p>
+            <a:pPr algn="l"/>
+            <a:r>
+              <a:rPr kumimoji="1" lang="ja-JP" altLang="en-US" sz="2400" dirty="0">
+                <a:solidFill>
+                  <a:schemeClr val="bg1"/>
+                </a:solidFill>
+              </a:rPr>
+              <a:t>他のメンバーが触るため、触りやすさを重視して実装しました。</a:t>
+            </a:r>
+            <a:endParaRPr kumimoji="1" lang="en-US" altLang="ja-JP" sz="2400" dirty="0">
+              <a:solidFill>
+                <a:schemeClr val="bg1"/>
+              </a:solidFill>
+            </a:endParaRPr>
+          </a:p>
+          <a:p>
+            <a:pPr algn="l"/>
+            <a:br>
+              <a:rPr lang="en-US" altLang="ja-JP" sz="2400" dirty="0"/>
+            </a:br>
+            <a:br>
+              <a:rPr lang="en-US" altLang="ja-JP" sz="2400" dirty="0"/>
+            </a:br>
+            <a:r>
+              <a:rPr lang="ja-JP" altLang="en-US" sz="2400" dirty="0">
+                <a:solidFill>
+                  <a:schemeClr val="bg1"/>
+                </a:solidFill>
+              </a:rPr>
+              <a:t>◆主に注力した点</a:t>
+            </a:r>
+            <a:br>
+              <a:rPr lang="ja-JP" altLang="en-US" sz="2400" dirty="0">
+                <a:solidFill>
+                  <a:schemeClr val="bg1"/>
+                </a:solidFill>
+              </a:rPr>
+            </a:br>
+            <a:r>
+              <a:rPr lang="ja-JP" altLang="en-US" sz="2400" dirty="0">
+                <a:solidFill>
+                  <a:schemeClr val="bg1"/>
+                </a:solidFill>
+              </a:rPr>
+              <a:t>・ </a:t>
+            </a:r>
+            <a:r>
+              <a:rPr lang="en-US" altLang="ja-JP" sz="2400" dirty="0">
+                <a:solidFill>
+                  <a:schemeClr val="bg1"/>
+                </a:solidFill>
+              </a:rPr>
+              <a:t>.CSV</a:t>
+            </a:r>
+            <a:r>
+              <a:rPr lang="ja-JP" altLang="en-US" sz="2400" dirty="0">
+                <a:solidFill>
+                  <a:schemeClr val="bg1"/>
+                </a:solidFill>
+              </a:rPr>
+              <a:t>は読み込み</a:t>
+            </a:r>
+            <a:endParaRPr lang="en-US" altLang="ja-JP" sz="2400" dirty="0">
+              <a:solidFill>
+                <a:schemeClr val="bg1"/>
+              </a:solidFill>
+            </a:endParaRPr>
+          </a:p>
+          <a:p>
+            <a:pPr algn="l"/>
+            <a:r>
+              <a:rPr lang="ja-JP" altLang="en-US" sz="2400" dirty="0">
+                <a:solidFill>
+                  <a:schemeClr val="bg1"/>
+                </a:solidFill>
+              </a:rPr>
+              <a:t>　 </a:t>
+            </a:r>
+            <a:r>
+              <a:rPr lang="ja-JP" altLang="en-US" sz="2400" b="1" dirty="0">
+                <a:solidFill>
+                  <a:schemeClr val="bg1"/>
+                </a:solidFill>
+              </a:rPr>
+              <a:t>→</a:t>
+            </a:r>
+            <a:r>
+              <a:rPr lang="ja-JP" altLang="en-US" sz="2400" b="1" dirty="0">
+                <a:solidFill>
+                  <a:srgbClr val="FF0000"/>
+                </a:solidFill>
+              </a:rPr>
+              <a:t> </a:t>
+            </a:r>
+            <a:r>
+              <a:rPr lang="ja-JP" altLang="en-US" sz="2400" b="1" u="sng" dirty="0">
+                <a:solidFill>
+                  <a:srgbClr val="FF0000"/>
+                </a:solidFill>
+              </a:rPr>
+              <a:t>再生成処理に対応／カメラ調整不要な設計</a:t>
+            </a:r>
+            <a:endParaRPr lang="en-US" altLang="ja-JP" sz="2400" b="1" u="sng" dirty="0">
+              <a:solidFill>
+                <a:srgbClr val="FF0000"/>
+              </a:solidFill>
+            </a:endParaRPr>
+          </a:p>
+          <a:p>
+            <a:pPr algn="l"/>
+            <a:r>
+              <a:rPr lang="ja-JP" altLang="en-US" sz="2400" dirty="0">
+                <a:solidFill>
+                  <a:schemeClr val="bg1"/>
+                </a:solidFill>
+              </a:rPr>
+              <a:t>・ シーン遷移マネージャー</a:t>
+            </a:r>
+            <a:br>
+              <a:rPr lang="en-US" altLang="ja-JP" sz="2400" dirty="0">
+                <a:solidFill>
+                  <a:schemeClr val="bg1"/>
+                </a:solidFill>
+              </a:rPr>
+            </a:br>
+            <a:r>
+              <a:rPr lang="ja-JP" altLang="en-US" sz="2400" dirty="0">
+                <a:solidFill>
+                  <a:schemeClr val="bg1"/>
+                </a:solidFill>
+              </a:rPr>
+              <a:t>　 → 追加読み込み方式で、リスタート時に</a:t>
+            </a:r>
+            <a:br>
+              <a:rPr lang="en-US" altLang="ja-JP" sz="2400" dirty="0">
+                <a:solidFill>
+                  <a:schemeClr val="bg1"/>
+                </a:solidFill>
+              </a:rPr>
+            </a:br>
+            <a:r>
+              <a:rPr lang="ja-JP" altLang="en-US" sz="2400" dirty="0">
+                <a:solidFill>
+                  <a:schemeClr val="bg1"/>
+                </a:solidFill>
+              </a:rPr>
+              <a:t>　　  </a:t>
+            </a:r>
+            <a:r>
+              <a:rPr lang="ja-JP" altLang="en-US" sz="2400" b="1" u="sng" dirty="0">
+                <a:solidFill>
+                  <a:srgbClr val="FF0000"/>
+                </a:solidFill>
+              </a:rPr>
+              <a:t>カクついて</a:t>
+            </a:r>
+            <a:r>
+              <a:rPr lang="ja-JP" altLang="en-US" sz="2400" dirty="0">
+                <a:solidFill>
+                  <a:schemeClr val="bg1"/>
+                </a:solidFill>
+              </a:rPr>
+              <a:t>テンポが悪くならないようにしました</a:t>
+            </a:r>
+            <a:endParaRPr kumimoji="1" lang="en-US" altLang="ja-JP" sz="2400" dirty="0">
+              <a:solidFill>
+                <a:schemeClr val="bg1"/>
+              </a:solidFill>
+            </a:endParaRPr>
+          </a:p>
+        </p:txBody>
+      </p:sp>
+      <p:sp>
+        <p:nvSpPr>
+          <p:cNvPr id="18" name="テキスト ボックス 17">
             <a:extLst>
               <a:ext uri="{FF2B5EF4-FFF2-40B4-BE49-F238E27FC236}">
-                <a16:creationId xmlns:a16="http://schemas.microsoft.com/office/drawing/2014/main" id="{F320E06A-4618-5650-EE18-BFD8D7B7EDE2}"/>
+                <a16:creationId xmlns:a16="http://schemas.microsoft.com/office/drawing/2014/main" id="{42A65CEA-50C7-8799-839D-5DA6A95C1585}"/>
               </a:ext>
             </a:extLst>
           </p:cNvPr>
@@ -2226,14 +4716,14 @@
         </p:nvSpPr>
         <p:spPr>
           <a:xfrm>
-            <a:off x="371168" y="2255114"/>
-            <a:ext cx="10754032" cy="461665"/>
+            <a:off x="365338" y="1435221"/>
+            <a:ext cx="2298344" cy="584775"/>
           </a:xfrm>
           <a:prstGeom prst="rect">
             <a:avLst/>
           </a:prstGeom>
           <a:noFill/>
-          <a:ln>
+          <a:ln w="19050">
             <a:noFill/>
           </a:ln>
         </p:spPr>
@@ -2243,26 +4733,550 @@
           </a:bodyPr>
           <a:lstStyle/>
           <a:p>
-            <a:r>
-              <a:rPr kumimoji="1" lang="ja-JP" altLang="en-US" sz="2400" dirty="0">
-                <a:solidFill>
-                  <a:schemeClr val="bg1"/>
-                </a:solidFill>
-              </a:rPr>
-              <a:t>リソース管理を名前で</a:t>
-            </a:r>
-            <a:endParaRPr kumimoji="1" lang="en-US" altLang="ja-JP" sz="2400" dirty="0">
+            <a:pPr algn="l"/>
+            <a:r>
+              <a:rPr kumimoji="1" lang="ja-JP" altLang="en-US" sz="3200" b="1" u="sng" dirty="0">
+                <a:solidFill>
+                  <a:schemeClr val="bg1"/>
+                </a:solidFill>
+              </a:rPr>
+              <a:t>担当箇所</a:t>
+            </a:r>
+          </a:p>
+        </p:txBody>
+      </p:sp>
+      <p:pic>
+        <p:nvPicPr>
+          <p:cNvPr id="3" name="図 2" descr="携帯電話の画面のスクリーンショット&#10;&#10;AI 生成コンテンツは誤りを含む可能性があります。">
+            <a:extLst>
+              <a:ext uri="{FF2B5EF4-FFF2-40B4-BE49-F238E27FC236}">
+                <a16:creationId xmlns:a16="http://schemas.microsoft.com/office/drawing/2014/main" id="{A93E4668-1082-C677-1040-0D4CC619A732}"/>
+              </a:ext>
+            </a:extLst>
+          </p:cNvPr>
+          <p:cNvPicPr>
+            <a:picLocks noChangeAspect="1"/>
+          </p:cNvPicPr>
+          <p:nvPr/>
+        </p:nvPicPr>
+        <p:blipFill>
+          <a:blip r:embed="rId3"/>
+          <a:stretch>
+            <a:fillRect/>
+          </a:stretch>
+        </p:blipFill>
+        <p:spPr>
+          <a:xfrm>
+            <a:off x="8077200" y="3429000"/>
+            <a:ext cx="3954191" cy="3170098"/>
+          </a:xfrm>
+          <a:prstGeom prst="rect">
+            <a:avLst/>
+          </a:prstGeom>
+        </p:spPr>
+      </p:pic>
+    </p:spTree>
+    <p:extLst>
+      <p:ext uri="{BB962C8B-B14F-4D97-AF65-F5344CB8AC3E}">
+        <p14:creationId xmlns:p14="http://schemas.microsoft.com/office/powerpoint/2010/main" val="3431513509"/>
+      </p:ext>
+    </p:extLst>
+  </p:cSld>
+  <p:clrMapOvr>
+    <a:masterClrMapping/>
+  </p:clrMapOvr>
+</p:sld>
+</file>
+
+<file path=ppt/slides/slide7.xml><?xml version="1.0" encoding="utf-8"?>
+<p:sld xmlns:a="http://schemas.openxmlformats.org/drawingml/2006/main" xmlns:r="http://schemas.openxmlformats.org/officeDocument/2006/relationships" xmlns:p="http://schemas.openxmlformats.org/presentationml/2006/main">
+  <p:cSld>
+    <p:spTree>
+      <p:nvGrpSpPr>
+        <p:cNvPr id="1" name="">
+          <a:extLst>
+            <a:ext uri="{FF2B5EF4-FFF2-40B4-BE49-F238E27FC236}">
+              <a16:creationId xmlns:a16="http://schemas.microsoft.com/office/drawing/2014/main" id="{AFA43E11-F305-EF19-3EA8-0B1610EB946E}"/>
+            </a:ext>
+          </a:extLst>
+        </p:cNvPr>
+        <p:cNvGrpSpPr/>
+        <p:nvPr/>
+      </p:nvGrpSpPr>
+      <p:grpSpPr>
+        <a:xfrm>
+          <a:off x="0" y="0"/>
+          <a:ext cx="0" cy="0"/>
+          <a:chOff x="0" y="0"/>
+          <a:chExt cx="0" cy="0"/>
+        </a:xfrm>
+      </p:grpSpPr>
+      <p:sp>
+        <p:nvSpPr>
+          <p:cNvPr id="2" name="タイトル 1">
+            <a:extLst>
+              <a:ext uri="{FF2B5EF4-FFF2-40B4-BE49-F238E27FC236}">
+                <a16:creationId xmlns:a16="http://schemas.microsoft.com/office/drawing/2014/main" id="{789C6CD8-E84C-1F68-E781-D5DAFCCD9AC1}"/>
+              </a:ext>
+            </a:extLst>
+          </p:cNvPr>
+          <p:cNvSpPr>
+            <a:spLocks noGrp="1"/>
+          </p:cNvSpPr>
+          <p:nvPr>
+            <p:ph type="title"/>
+          </p:nvPr>
+        </p:nvSpPr>
+        <p:spPr>
+          <a:xfrm>
+            <a:off x="371168" y="390833"/>
+            <a:ext cx="9992032" cy="923330"/>
+          </a:xfrm>
+        </p:spPr>
+        <p:txBody>
+          <a:bodyPr/>
+          <a:lstStyle/>
+          <a:p>
+            <a:r>
+              <a:rPr kumimoji="1" lang="ja-JP" altLang="en-US" sz="6000" dirty="0"/>
+              <a:t>制作作品</a:t>
+            </a:r>
+            <a:r>
+              <a:rPr kumimoji="1" lang="ja-JP" altLang="en-US" sz="6000" u="none" dirty="0"/>
+              <a:t> </a:t>
+            </a:r>
+            <a:r>
+              <a:rPr kumimoji="1" lang="ja-JP" altLang="en-US" sz="6000" dirty="0"/>
+              <a:t>チーム制作作品②</a:t>
+            </a:r>
+          </a:p>
+        </p:txBody>
+      </p:sp>
+      <p:sp>
+        <p:nvSpPr>
+          <p:cNvPr id="5" name="テキスト ボックス 4">
+            <a:extLst>
+              <a:ext uri="{FF2B5EF4-FFF2-40B4-BE49-F238E27FC236}">
+                <a16:creationId xmlns:a16="http://schemas.microsoft.com/office/drawing/2014/main" id="{4336FDBA-E0C0-696E-656D-E9A6151737B6}"/>
+              </a:ext>
+            </a:extLst>
+          </p:cNvPr>
+          <p:cNvSpPr txBox="1"/>
+          <p:nvPr/>
+        </p:nvSpPr>
+        <p:spPr>
+          <a:xfrm>
+            <a:off x="182293" y="1502506"/>
+            <a:ext cx="3070861" cy="584775"/>
+          </a:xfrm>
+          <a:prstGeom prst="rect">
+            <a:avLst/>
+          </a:prstGeom>
+          <a:noFill/>
+          <a:ln w="19050">
+            <a:noFill/>
+          </a:ln>
+        </p:spPr>
+        <p:txBody>
+          <a:bodyPr wrap="square" rtlCol="0">
+            <a:spAutoFit/>
+          </a:bodyPr>
+          <a:lstStyle/>
+          <a:p>
+            <a:pPr algn="l"/>
+            <a:r>
+              <a:rPr kumimoji="1" lang="ja-JP" altLang="en-US" sz="3200" b="1" u="sng" dirty="0">
+                <a:solidFill>
+                  <a:schemeClr val="bg1"/>
+                </a:solidFill>
+              </a:rPr>
+              <a:t>ゲームジャンル</a:t>
+            </a:r>
+          </a:p>
+        </p:txBody>
+      </p:sp>
+      <p:pic>
+        <p:nvPicPr>
+          <p:cNvPr id="7" name="図 6" descr="グラフィカル ユーザー インターフェイス が含まれている画像&#10;&#10;AI 生成コンテンツは誤りを含む可能性があります。">
+            <a:extLst>
+              <a:ext uri="{FF2B5EF4-FFF2-40B4-BE49-F238E27FC236}">
+                <a16:creationId xmlns:a16="http://schemas.microsoft.com/office/drawing/2014/main" id="{801AA462-6B59-CAB6-13D9-58F1D9C9094C}"/>
+              </a:ext>
+            </a:extLst>
+          </p:cNvPr>
+          <p:cNvPicPr>
+            <a:picLocks noChangeAspect="1"/>
+          </p:cNvPicPr>
+          <p:nvPr/>
+        </p:nvPicPr>
+        <p:blipFill>
+          <a:blip r:embed="rId2"/>
+          <a:stretch>
+            <a:fillRect/>
+          </a:stretch>
+        </p:blipFill>
+        <p:spPr>
+          <a:xfrm>
+            <a:off x="5643824" y="1939546"/>
+            <a:ext cx="6436506" cy="3558552"/>
+          </a:xfrm>
+          <a:prstGeom prst="rect">
+            <a:avLst/>
+          </a:prstGeom>
+        </p:spPr>
+      </p:pic>
+      <p:sp>
+        <p:nvSpPr>
+          <p:cNvPr id="8" name="テキスト ボックス 7">
+            <a:extLst>
+              <a:ext uri="{FF2B5EF4-FFF2-40B4-BE49-F238E27FC236}">
+                <a16:creationId xmlns:a16="http://schemas.microsoft.com/office/drawing/2014/main" id="{2F878BB2-ADC0-06F7-460C-DC9C8F6F55C9}"/>
+              </a:ext>
+            </a:extLst>
+          </p:cNvPr>
+          <p:cNvSpPr txBox="1"/>
+          <p:nvPr/>
+        </p:nvSpPr>
+        <p:spPr>
+          <a:xfrm>
+            <a:off x="182293" y="3206603"/>
+            <a:ext cx="5343832" cy="707886"/>
+          </a:xfrm>
+          <a:prstGeom prst="rect">
+            <a:avLst/>
+          </a:prstGeom>
+          <a:noFill/>
+          <a:ln w="19050">
+            <a:noFill/>
+          </a:ln>
+        </p:spPr>
+        <p:txBody>
+          <a:bodyPr wrap="square" rtlCol="0">
+            <a:spAutoFit/>
+          </a:bodyPr>
+          <a:lstStyle/>
+          <a:p>
+            <a:pPr algn="l"/>
+            <a:r>
+              <a:rPr kumimoji="1" lang="ja-JP" altLang="en-US" sz="2000" dirty="0">
+                <a:solidFill>
+                  <a:schemeClr val="bg1"/>
+                </a:solidFill>
+              </a:rPr>
+              <a:t>風船を膨らませて山頂まで目指すゲームです。</a:t>
+            </a:r>
+            <a:endParaRPr kumimoji="1" lang="en-US" altLang="ja-JP" sz="2000" dirty="0">
               <a:solidFill>
                 <a:schemeClr val="bg1"/>
               </a:solidFill>
             </a:endParaRPr>
           </a:p>
+          <a:p>
+            <a:pPr algn="l"/>
+            <a:r>
+              <a:rPr kumimoji="1" lang="en-US" altLang="ja-JP" sz="2000" dirty="0">
+                <a:solidFill>
+                  <a:schemeClr val="bg1"/>
+                </a:solidFill>
+              </a:rPr>
+              <a:t>DirectX11</a:t>
+            </a:r>
+            <a:r>
+              <a:rPr kumimoji="1" lang="ja-JP" altLang="en-US" sz="2000" dirty="0">
+                <a:solidFill>
+                  <a:schemeClr val="bg1"/>
+                </a:solidFill>
+              </a:rPr>
+              <a:t>を使用して作成しています。</a:t>
+            </a:r>
+            <a:endParaRPr kumimoji="1" lang="en-US" altLang="ja-JP" sz="2000" dirty="0">
+              <a:solidFill>
+                <a:schemeClr val="bg1"/>
+              </a:solidFill>
+            </a:endParaRPr>
+          </a:p>
+        </p:txBody>
+      </p:sp>
+      <p:sp>
+        <p:nvSpPr>
+          <p:cNvPr id="9" name="テキスト ボックス 8">
+            <a:extLst>
+              <a:ext uri="{FF2B5EF4-FFF2-40B4-BE49-F238E27FC236}">
+                <a16:creationId xmlns:a16="http://schemas.microsoft.com/office/drawing/2014/main" id="{FFA8F7C9-C8B9-66B4-C92F-74D058AA5615}"/>
+              </a:ext>
+            </a:extLst>
+          </p:cNvPr>
+          <p:cNvSpPr txBox="1"/>
+          <p:nvPr/>
+        </p:nvSpPr>
+        <p:spPr>
+          <a:xfrm>
+            <a:off x="217462" y="2551767"/>
+            <a:ext cx="2298344" cy="584775"/>
+          </a:xfrm>
+          <a:prstGeom prst="rect">
+            <a:avLst/>
+          </a:prstGeom>
+          <a:noFill/>
+          <a:ln w="19050">
+            <a:noFill/>
+          </a:ln>
+        </p:spPr>
+        <p:txBody>
+          <a:bodyPr wrap="square" rtlCol="0">
+            <a:spAutoFit/>
+          </a:bodyPr>
+          <a:lstStyle/>
+          <a:p>
+            <a:pPr algn="l"/>
+            <a:r>
+              <a:rPr kumimoji="1" lang="ja-JP" altLang="en-US" sz="3200" b="1" u="sng" dirty="0">
+                <a:solidFill>
+                  <a:schemeClr val="bg1"/>
+                </a:solidFill>
+              </a:rPr>
+              <a:t>ゲーム概要</a:t>
+            </a:r>
+          </a:p>
+        </p:txBody>
+      </p:sp>
+      <p:sp>
+        <p:nvSpPr>
+          <p:cNvPr id="10" name="テキスト ボックス 9">
+            <a:extLst>
+              <a:ext uri="{FF2B5EF4-FFF2-40B4-BE49-F238E27FC236}">
+                <a16:creationId xmlns:a16="http://schemas.microsoft.com/office/drawing/2014/main" id="{20C2E7A8-89A9-0E11-0E04-BB7CA1EA0C88}"/>
+              </a:ext>
+            </a:extLst>
+          </p:cNvPr>
+          <p:cNvSpPr txBox="1"/>
+          <p:nvPr/>
+        </p:nvSpPr>
+        <p:spPr>
+          <a:xfrm>
+            <a:off x="205739" y="4528175"/>
+            <a:ext cx="7947661" cy="1938992"/>
+          </a:xfrm>
+          <a:prstGeom prst="rect">
+            <a:avLst/>
+          </a:prstGeom>
+          <a:noFill/>
+          <a:ln w="19050">
+            <a:noFill/>
+          </a:ln>
+        </p:spPr>
+        <p:txBody>
+          <a:bodyPr wrap="square" rtlCol="0">
+            <a:spAutoFit/>
+          </a:bodyPr>
+          <a:lstStyle/>
+          <a:p>
+            <a:pPr algn="l"/>
+            <a:r>
+              <a:rPr kumimoji="1" lang="ja-JP" altLang="en-US" sz="2000" dirty="0">
+                <a:solidFill>
+                  <a:schemeClr val="bg1"/>
+                </a:solidFill>
+              </a:rPr>
+              <a:t>・ ギミック　 ・ タイマー </a:t>
+            </a:r>
+            <a:endParaRPr kumimoji="1" lang="en-US" altLang="ja-JP" sz="2000" dirty="0">
+              <a:solidFill>
+                <a:schemeClr val="bg1"/>
+              </a:solidFill>
+            </a:endParaRPr>
+          </a:p>
+          <a:p>
+            <a:pPr algn="l"/>
+            <a:r>
+              <a:rPr kumimoji="1" lang="ja-JP" altLang="en-US" sz="2000" dirty="0">
+                <a:solidFill>
+                  <a:schemeClr val="bg1"/>
+                </a:solidFill>
+              </a:rPr>
+              <a:t>・ 当たり判定 ・リザルト画面</a:t>
+            </a:r>
+            <a:endParaRPr kumimoji="1" lang="en-US" altLang="ja-JP" sz="2000" dirty="0">
+              <a:solidFill>
+                <a:schemeClr val="bg1"/>
+              </a:solidFill>
+            </a:endParaRPr>
+          </a:p>
+          <a:p>
+            <a:pPr algn="l"/>
+            <a:r>
+              <a:rPr kumimoji="1" lang="ja-JP" altLang="en-US" sz="2000" dirty="0">
+                <a:solidFill>
+                  <a:schemeClr val="bg1"/>
+                </a:solidFill>
+              </a:rPr>
+              <a:t>・ 重力処理</a:t>
+            </a:r>
+            <a:br>
+              <a:rPr kumimoji="1" lang="en-US" altLang="ja-JP" sz="2000" dirty="0">
+                <a:solidFill>
+                  <a:schemeClr val="bg1"/>
+                </a:solidFill>
+              </a:rPr>
+            </a:br>
+            <a:endParaRPr kumimoji="1" lang="en-US" altLang="ja-JP" sz="2000" dirty="0">
+              <a:solidFill>
+                <a:schemeClr val="bg1"/>
+              </a:solidFill>
+            </a:endParaRPr>
+          </a:p>
+          <a:p>
+            <a:pPr algn="l"/>
+            <a:r>
+              <a:rPr kumimoji="1" lang="ja-JP" altLang="en-US" sz="2000" dirty="0">
+                <a:solidFill>
+                  <a:schemeClr val="bg1"/>
+                </a:solidFill>
+              </a:rPr>
+              <a:t>重力はゲームの面白さに大きくかかわる大事なところだったため、</a:t>
+            </a:r>
+            <a:br>
+              <a:rPr kumimoji="1" lang="en-US" altLang="ja-JP" sz="2000" dirty="0">
+                <a:solidFill>
+                  <a:schemeClr val="bg1"/>
+                </a:solidFill>
+              </a:rPr>
+            </a:br>
+            <a:r>
+              <a:rPr kumimoji="1" lang="ja-JP" altLang="en-US" sz="2000" b="1" u="sng" dirty="0">
+                <a:solidFill>
+                  <a:srgbClr val="FF0000"/>
+                </a:solidFill>
+              </a:rPr>
+              <a:t>細かく調整ができるように重力、風の影響、質量を実装</a:t>
+            </a:r>
+            <a:r>
+              <a:rPr kumimoji="1" lang="ja-JP" altLang="en-US" sz="2000" dirty="0">
+                <a:solidFill>
+                  <a:schemeClr val="bg1"/>
+                </a:solidFill>
+              </a:rPr>
+              <a:t>しました。</a:t>
+            </a:r>
+            <a:endParaRPr kumimoji="1" lang="en-US" altLang="ja-JP" sz="2000" dirty="0">
+              <a:solidFill>
+                <a:schemeClr val="bg1"/>
+              </a:solidFill>
+            </a:endParaRPr>
+          </a:p>
+        </p:txBody>
+      </p:sp>
+      <p:sp>
+        <p:nvSpPr>
+          <p:cNvPr id="11" name="テキスト ボックス 10">
+            <a:extLst>
+              <a:ext uri="{FF2B5EF4-FFF2-40B4-BE49-F238E27FC236}">
+                <a16:creationId xmlns:a16="http://schemas.microsoft.com/office/drawing/2014/main" id="{7425FA7E-CA57-6ADD-E8C5-5E16E014A7FF}"/>
+              </a:ext>
+            </a:extLst>
+          </p:cNvPr>
+          <p:cNvSpPr txBox="1"/>
+          <p:nvPr/>
+        </p:nvSpPr>
+        <p:spPr>
+          <a:xfrm>
+            <a:off x="214113" y="3943400"/>
+            <a:ext cx="2298344" cy="584775"/>
+          </a:xfrm>
+          <a:prstGeom prst="rect">
+            <a:avLst/>
+          </a:prstGeom>
+          <a:noFill/>
+          <a:ln w="19050">
+            <a:noFill/>
+          </a:ln>
+        </p:spPr>
+        <p:txBody>
+          <a:bodyPr wrap="square" rtlCol="0">
+            <a:spAutoFit/>
+          </a:bodyPr>
+          <a:lstStyle/>
+          <a:p>
+            <a:pPr algn="l"/>
+            <a:r>
+              <a:rPr kumimoji="1" lang="ja-JP" altLang="en-US" sz="3200" b="1" u="sng" dirty="0">
+                <a:solidFill>
+                  <a:schemeClr val="bg1"/>
+                </a:solidFill>
+              </a:rPr>
+              <a:t>担当箇所</a:t>
+            </a:r>
+          </a:p>
+        </p:txBody>
+      </p:sp>
+      <p:sp>
+        <p:nvSpPr>
+          <p:cNvPr id="12" name="テキスト ボックス 11">
+            <a:extLst>
+              <a:ext uri="{FF2B5EF4-FFF2-40B4-BE49-F238E27FC236}">
+                <a16:creationId xmlns:a16="http://schemas.microsoft.com/office/drawing/2014/main" id="{BBADE79E-374D-A279-416D-A0BEDABFBAEC}"/>
+              </a:ext>
+            </a:extLst>
+          </p:cNvPr>
+          <p:cNvSpPr txBox="1"/>
+          <p:nvPr/>
+        </p:nvSpPr>
+        <p:spPr>
+          <a:xfrm>
+            <a:off x="182293" y="2144519"/>
+            <a:ext cx="2801230" cy="400110"/>
+          </a:xfrm>
+          <a:prstGeom prst="rect">
+            <a:avLst/>
+          </a:prstGeom>
+          <a:noFill/>
+          <a:ln w="19050">
+            <a:noFill/>
+          </a:ln>
+        </p:spPr>
+        <p:txBody>
+          <a:bodyPr wrap="square" rtlCol="0">
+            <a:spAutoFit/>
+          </a:bodyPr>
+          <a:lstStyle/>
+          <a:p>
+            <a:r>
+              <a:rPr kumimoji="1" lang="ja-JP" altLang="ja-JP" sz="1800" b="1" dirty="0">
+                <a:solidFill>
+                  <a:schemeClr val="bg1"/>
+                </a:solidFill>
+              </a:rPr>
+              <a:t>２</a:t>
+            </a:r>
+            <a:r>
+              <a:rPr kumimoji="1" lang="en-US" altLang="ja-JP" sz="1800" b="1" dirty="0">
+                <a:solidFill>
+                  <a:schemeClr val="bg1"/>
+                </a:solidFill>
+              </a:rPr>
+              <a:t>D</a:t>
+            </a:r>
+            <a:r>
+              <a:rPr kumimoji="1" lang="ja-JP" altLang="ja-JP" sz="2000" dirty="0">
+                <a:solidFill>
+                  <a:schemeClr val="bg1"/>
+                </a:solidFill>
+              </a:rPr>
+              <a:t>アクションゲーム</a:t>
+            </a:r>
+            <a:endParaRPr lang="ja-JP" altLang="ja-JP" sz="2000" dirty="0">
+              <a:solidFill>
+                <a:schemeClr val="bg1"/>
+              </a:solidFill>
+              <a:effectLst/>
+            </a:endParaRPr>
+          </a:p>
         </p:txBody>
       </p:sp>
     </p:spTree>
     <p:extLst>
       <p:ext uri="{BB962C8B-B14F-4D97-AF65-F5344CB8AC3E}">
-        <p14:creationId xmlns:p14="http://schemas.microsoft.com/office/powerpoint/2010/main" val="534583892"/>
+        <p14:creationId xmlns:p14="http://schemas.microsoft.com/office/powerpoint/2010/main" val="2859369899"/>
       </p:ext>
     </p:extLst>
   </p:cSld>
@@ -2553,4 +5567,319 @@
   <a:objectDefaults/>
   <a:extraClrSchemeLst/>
 </a:theme>
+</file>
+
+<file path=ppt/theme/theme2.xml><?xml version="1.0" encoding="utf-8"?>
+<a:theme xmlns:a="http://schemas.openxmlformats.org/drawingml/2006/main" name="Office テーマ">
+  <a:themeElements>
+    <a:clrScheme name="Office">
+      <a:dk1>
+        <a:sysClr val="windowText" lastClr="000000"/>
+      </a:dk1>
+      <a:lt1>
+        <a:sysClr val="window" lastClr="FFFFFF"/>
+      </a:lt1>
+      <a:dk2>
+        <a:srgbClr val="0E2841"/>
+      </a:dk2>
+      <a:lt2>
+        <a:srgbClr val="E8E8E8"/>
+      </a:lt2>
+      <a:accent1>
+        <a:srgbClr val="156082"/>
+      </a:accent1>
+      <a:accent2>
+        <a:srgbClr val="E97132"/>
+      </a:accent2>
+      <a:accent3>
+        <a:srgbClr val="196B24"/>
+      </a:accent3>
+      <a:accent4>
+        <a:srgbClr val="0F9ED5"/>
+      </a:accent4>
+      <a:accent5>
+        <a:srgbClr val="A02B93"/>
+      </a:accent5>
+      <a:accent6>
+        <a:srgbClr val="4EA72E"/>
+      </a:accent6>
+      <a:hlink>
+        <a:srgbClr val="467886"/>
+      </a:hlink>
+      <a:folHlink>
+        <a:srgbClr val="96607D"/>
+      </a:folHlink>
+    </a:clrScheme>
+    <a:fontScheme name="Office">
+      <a:majorFont>
+        <a:latin typeface="游ゴシック Light" panose="02110004020202020204"/>
+        <a:ea typeface=""/>
+        <a:cs typeface=""/>
+        <a:font script="Jpan" typeface="游ゴシック Light"/>
+        <a:font script="Hang" typeface="맑은 고딕"/>
+        <a:font script="Hans" typeface="等线 Light"/>
+        <a:font script="Hant" typeface="新細明體"/>
+        <a:font script="Arab" typeface="Times New Roman"/>
+        <a:font script="Hebr" typeface="Times New Roman"/>
+        <a:font script="Thai" typeface="Angsana New"/>
+        <a:font script="Ethi" typeface="Nyala"/>
+        <a:font script="Beng" typeface="Vrinda"/>
+        <a:font script="Gujr" typeface="Shruti"/>
+        <a:font script="Khmr" typeface="MoolBoran"/>
+        <a:font script="Knda" typeface="Tunga"/>
+        <a:font script="Guru" typeface="Raavi"/>
+        <a:font script="Cans" typeface="Euphemia"/>
+        <a:font script="Cher" typeface="Plantagenet Cherokee"/>
+        <a:font script="Yiii" typeface="Microsoft Yi Baiti"/>
+        <a:font script="Tibt" typeface="Microsoft Himalaya"/>
+        <a:font script="Thaa" typeface="MV Boli"/>
+        <a:font script="Deva" typeface="Mangal"/>
+        <a:font script="Telu" typeface="Gautami"/>
+        <a:font script="Taml" typeface="Latha"/>
+        <a:font script="Syrc" typeface="Estrangelo Edessa"/>
+        <a:font script="Orya" typeface="Kalinga"/>
+        <a:font script="Mlym" typeface="Kartika"/>
+        <a:font script="Laoo" typeface="DokChampa"/>
+        <a:font script="Sinh" typeface="Iskoola Pota"/>
+        <a:font script="Mong" typeface="Mongolian Baiti"/>
+        <a:font script="Viet" typeface="Times New Roman"/>
+        <a:font script="Uigh" typeface="Microsoft Uighur"/>
+        <a:font script="Geor" typeface="Sylfaen"/>
+        <a:font script="Armn" typeface="Arial"/>
+        <a:font script="Bugi" typeface="Leelawadee UI"/>
+        <a:font script="Bopo" typeface="Microsoft JhengHei"/>
+        <a:font script="Java" typeface="Javanese Text"/>
+        <a:font script="Lisu" typeface="Segoe UI"/>
+        <a:font script="Mymr" typeface="Myanmar Text"/>
+        <a:font script="Nkoo" typeface="Ebrima"/>
+        <a:font script="Olck" typeface="Nirmala UI"/>
+        <a:font script="Osma" typeface="Ebrima"/>
+        <a:font script="Phag" typeface="Phagspa"/>
+        <a:font script="Syrn" typeface="Estrangelo Edessa"/>
+        <a:font script="Syrj" typeface="Estrangelo Edessa"/>
+        <a:font script="Syre" typeface="Estrangelo Edessa"/>
+        <a:font script="Sora" typeface="Nirmala UI"/>
+        <a:font script="Tale" typeface="Microsoft Tai Le"/>
+        <a:font script="Talu" typeface="Microsoft New Tai Lue"/>
+        <a:font script="Tfng" typeface="Ebrima"/>
+      </a:majorFont>
+      <a:minorFont>
+        <a:latin typeface="游ゴシック" panose="02110004020202020204"/>
+        <a:ea typeface=""/>
+        <a:cs typeface=""/>
+        <a:font script="Jpan" typeface="游ゴシック"/>
+        <a:font script="Hang" typeface="맑은 고딕"/>
+        <a:font script="Hans" typeface="等线"/>
+        <a:font script="Hant" typeface="新細明體"/>
+        <a:font script="Arab" typeface="Arial"/>
+        <a:font script="Hebr" typeface="Arial"/>
+        <a:font script="Thai" typeface="Cordia New"/>
+        <a:font script="Ethi" typeface="Nyala"/>
+        <a:font script="Beng" typeface="Vrinda"/>
+        <a:font script="Gujr" typeface="Shruti"/>
+        <a:font script="Khmr" typeface="DaunPenh"/>
+        <a:font script="Knda" typeface="Tunga"/>
+        <a:font script="Guru" typeface="Raavi"/>
+        <a:font script="Cans" typeface="Euphemia"/>
+        <a:font script="Cher" typeface="Plantagenet Cherokee"/>
+        <a:font script="Yiii" typeface="Microsoft Yi Baiti"/>
+        <a:font script="Tibt" typeface="Microsoft Himalaya"/>
+        <a:font script="Thaa" typeface="MV Boli"/>
+        <a:font script="Deva" typeface="Mangal"/>
+        <a:font script="Telu" typeface="Gautami"/>
+        <a:font script="Taml" typeface="Latha"/>
+        <a:font script="Syrc" typeface="Estrangelo Edessa"/>
+        <a:font script="Orya" typeface="Kalinga"/>
+        <a:font script="Mlym" typeface="Kartika"/>
+        <a:font script="Laoo" typeface="DokChampa"/>
+        <a:font script="Sinh" typeface="Iskoola Pota"/>
+        <a:font script="Mong" typeface="Mongolian Baiti"/>
+        <a:font script="Viet" typeface="Arial"/>
+        <a:font script="Uigh" typeface="Microsoft Uighur"/>
+        <a:font script="Geor" typeface="Sylfaen"/>
+        <a:font script="Armn" typeface="Arial"/>
+        <a:font script="Bugi" typeface="Leelawadee UI"/>
+        <a:font script="Bopo" typeface="Microsoft JhengHei"/>
+        <a:font script="Java" typeface="Javanese Text"/>
+        <a:font script="Lisu" typeface="Segoe UI"/>
+        <a:font script="Mymr" typeface="Myanmar Text"/>
+        <a:font script="Nkoo" typeface="Ebrima"/>
+        <a:font script="Olck" typeface="Nirmala UI"/>
+        <a:font script="Osma" typeface="Ebrima"/>
+        <a:font script="Phag" typeface="Phagspa"/>
+        <a:font script="Syrn" typeface="Estrangelo Edessa"/>
+        <a:font script="Syrj" typeface="Estrangelo Edessa"/>
+        <a:font script="Syre" typeface="Estrangelo Edessa"/>
+        <a:font script="Sora" typeface="Nirmala UI"/>
+        <a:font script="Tale" typeface="Microsoft Tai Le"/>
+        <a:font script="Talu" typeface="Microsoft New Tai Lue"/>
+        <a:font script="Tfng" typeface="Ebrima"/>
+      </a:minorFont>
+    </a:fontScheme>
+    <a:fmtScheme name="Office">
+      <a:fillStyleLst>
+        <a:solidFill>
+          <a:schemeClr val="phClr"/>
+        </a:solidFill>
+        <a:gradFill rotWithShape="1">
+          <a:gsLst>
+            <a:gs pos="0">
+              <a:schemeClr val="phClr">
+                <a:lumMod val="110000"/>
+                <a:satMod val="105000"/>
+                <a:tint val="67000"/>
+              </a:schemeClr>
+            </a:gs>
+            <a:gs pos="50000">
+              <a:schemeClr val="phClr">
+                <a:lumMod val="105000"/>
+                <a:satMod val="103000"/>
+                <a:tint val="73000"/>
+              </a:schemeClr>
+            </a:gs>
+            <a:gs pos="100000">
+              <a:schemeClr val="phClr">
+                <a:lumMod val="105000"/>
+                <a:satMod val="109000"/>
+                <a:tint val="81000"/>
+              </a:schemeClr>
+            </a:gs>
+          </a:gsLst>
+          <a:lin ang="5400000" scaled="0"/>
+        </a:gradFill>
+        <a:gradFill rotWithShape="1">
+          <a:gsLst>
+            <a:gs pos="0">
+              <a:schemeClr val="phClr">
+                <a:satMod val="103000"/>
+                <a:lumMod val="102000"/>
+                <a:tint val="94000"/>
+              </a:schemeClr>
+            </a:gs>
+            <a:gs pos="50000">
+              <a:schemeClr val="phClr">
+                <a:satMod val="110000"/>
+                <a:lumMod val="100000"/>
+                <a:shade val="100000"/>
+              </a:schemeClr>
+            </a:gs>
+            <a:gs pos="100000">
+              <a:schemeClr val="phClr">
+                <a:lumMod val="99000"/>
+                <a:satMod val="120000"/>
+                <a:shade val="78000"/>
+              </a:schemeClr>
+            </a:gs>
+          </a:gsLst>
+          <a:lin ang="5400000" scaled="0"/>
+        </a:gradFill>
+      </a:fillStyleLst>
+      <a:lnStyleLst>
+        <a:ln w="12700" cap="flat" cmpd="sng" algn="ctr">
+          <a:solidFill>
+            <a:schemeClr val="phClr"/>
+          </a:solidFill>
+          <a:prstDash val="solid"/>
+          <a:miter lim="800000"/>
+        </a:ln>
+        <a:ln w="19050" cap="flat" cmpd="sng" algn="ctr">
+          <a:solidFill>
+            <a:schemeClr val="phClr"/>
+          </a:solidFill>
+          <a:prstDash val="solid"/>
+          <a:miter lim="800000"/>
+        </a:ln>
+        <a:ln w="25400" cap="flat" cmpd="sng" algn="ctr">
+          <a:solidFill>
+            <a:schemeClr val="phClr"/>
+          </a:solidFill>
+          <a:prstDash val="solid"/>
+          <a:miter lim="800000"/>
+        </a:ln>
+      </a:lnStyleLst>
+      <a:effectStyleLst>
+        <a:effectStyle>
+          <a:effectLst/>
+        </a:effectStyle>
+        <a:effectStyle>
+          <a:effectLst/>
+        </a:effectStyle>
+        <a:effectStyle>
+          <a:effectLst>
+            <a:outerShdw blurRad="57150" dist="19050" dir="5400000" algn="ctr" rotWithShape="0">
+              <a:srgbClr val="000000">
+                <a:alpha val="63000"/>
+              </a:srgbClr>
+            </a:outerShdw>
+          </a:effectLst>
+        </a:effectStyle>
+      </a:effectStyleLst>
+      <a:bgFillStyleLst>
+        <a:solidFill>
+          <a:schemeClr val="phClr"/>
+        </a:solidFill>
+        <a:solidFill>
+          <a:schemeClr val="phClr">
+            <a:tint val="95000"/>
+            <a:satMod val="170000"/>
+          </a:schemeClr>
+        </a:solidFill>
+        <a:gradFill rotWithShape="1">
+          <a:gsLst>
+            <a:gs pos="0">
+              <a:schemeClr val="phClr">
+                <a:tint val="93000"/>
+                <a:satMod val="150000"/>
+                <a:shade val="98000"/>
+                <a:lumMod val="102000"/>
+              </a:schemeClr>
+            </a:gs>
+            <a:gs pos="50000">
+              <a:schemeClr val="phClr">
+                <a:tint val="98000"/>
+                <a:satMod val="130000"/>
+                <a:shade val="90000"/>
+                <a:lumMod val="103000"/>
+              </a:schemeClr>
+            </a:gs>
+            <a:gs pos="100000">
+              <a:schemeClr val="phClr">
+                <a:shade val="63000"/>
+                <a:satMod val="120000"/>
+              </a:schemeClr>
+            </a:gs>
+          </a:gsLst>
+          <a:lin ang="5400000" scaled="0"/>
+        </a:gradFill>
+      </a:bgFillStyleLst>
+    </a:fmtScheme>
+  </a:themeElements>
+  <a:objectDefaults>
+    <a:lnDef>
+      <a:spPr/>
+      <a:bodyPr/>
+      <a:lstStyle/>
+      <a:style>
+        <a:lnRef idx="2">
+          <a:schemeClr val="accent1"/>
+        </a:lnRef>
+        <a:fillRef idx="0">
+          <a:schemeClr val="accent1"/>
+        </a:fillRef>
+        <a:effectRef idx="1">
+          <a:schemeClr val="accent1"/>
+        </a:effectRef>
+        <a:fontRef idx="minor">
+          <a:schemeClr val="tx1"/>
+        </a:fontRef>
+      </a:style>
+    </a:lnDef>
+  </a:objectDefaults>
+  <a:extraClrSchemeLst/>
+  <a:extLst>
+    <a:ext uri="{05A4C25C-085E-4340-85A3-A5531E510DB2}">
+      <thm15:themeFamily xmlns:thm15="http://schemas.microsoft.com/office/thememl/2012/main" name="Office Theme" id="{2E142A2C-CD16-42D6-873A-C26D2A0506FA}" vid="{1BDDFF52-6CD6-40A5-AB3C-68EB2F1E4D0A}"/>
+    </a:ext>
+  </a:extLst>
+</a:theme>
 </file>